--- a/sectorial analysis.pptx
+++ b/sectorial analysis.pptx
@@ -1,28 +1,22 @@
 
 <file path=ppt/presentation.xml><?xml version="1.0" encoding="utf-8"?>
-<p:presentation xmlns:a="http://schemas.openxmlformats.org/drawingml/2006/main" xmlns:r="http://schemas.openxmlformats.org/officeDocument/2006/relationships" xmlns:p="http://schemas.openxmlformats.org/presentationml/2006/main" embedTrueTypeFonts="1" saveSubsetFonts="1">
+<p:presentation xmlns:a="http://schemas.openxmlformats.org/drawingml/2006/main" xmlns:r="http://schemas.openxmlformats.org/officeDocument/2006/relationships" xmlns:p="http://schemas.openxmlformats.org/presentationml/2006/main" saveSubsetFonts="1" embedTrueTypeFonts="true">
   <p:sldMasterIdLst>
     <p:sldMasterId id="2147483648" r:id="rId1"/>
   </p:sldMasterIdLst>
-  <p:notesMasterIdLst>
-    <p:notesMasterId r:id="rId3"/>
-  </p:notesMasterIdLst>
   <p:sldIdLst>
-    <p:sldId id="256" r:id="rId2"/>
+    <p:sldId id="256" r:id="rId6"/>
   </p:sldIdLst>
   <p:sldSz cx="17487900" cy="8153400"/>
   <p:notesSz cx="6858000" cy="9144000"/>
   <p:embeddedFontLst>
     <p:embeddedFont>
-      <p:font typeface="Alatsi" panose="020B0604020202020204" charset="0"/>
-      <p:regular r:id="rId4"/>
+      <p:font typeface="Alatsi" charset="1" panose="00000500000000000000"/>
+      <p:regular r:id="rId7"/>
     </p:embeddedFont>
     <p:embeddedFont>
-      <p:font typeface="Roboto Condensed" panose="02000000000000000000" pitchFamily="2" charset="0"/>
-      <p:regular r:id="rId5"/>
-      <p:bold r:id="rId6"/>
-      <p:italic r:id="rId7"/>
-      <p:boldItalic r:id="rId8"/>
+      <p:font typeface="Roboto Condensed" charset="1" panose="02000000000000000000"/>
+      <p:regular r:id="rId8"/>
     </p:embeddedFont>
   </p:embeddedFontLst>
   <p:defaultTextStyle>
@@ -120,457 +114,7 @@
       </a:defRPr>
     </a:lvl9pPr>
   </p:defaultTextStyle>
-  <p:extLst>
-    <p:ext uri="{EFAFB233-063F-42B5-8137-9DF3F51BA10A}">
-      <p15:sldGuideLst xmlns:p15="http://schemas.microsoft.com/office/powerpoint/2012/main">
-        <p15:guide id="1" orient="horz" pos="2160">
-          <p15:clr>
-            <a:srgbClr val="A4A3A4"/>
-          </p15:clr>
-        </p15:guide>
-        <p15:guide id="2" pos="2880">
-          <p15:clr>
-            <a:srgbClr val="A4A3A4"/>
-          </p15:clr>
-        </p15:guide>
-      </p15:sldGuideLst>
-    </p:ext>
-  </p:extLst>
 </p:presentation>
-</file>
-
-<file path=ppt/notesMasters/notesMaster1.xml><?xml version="1.0" encoding="utf-8"?>
-<p:notesMaster xmlns:a="http://schemas.openxmlformats.org/drawingml/2006/main" xmlns:r="http://schemas.openxmlformats.org/officeDocument/2006/relationships" xmlns:p="http://schemas.openxmlformats.org/presentationml/2006/main">
-  <p:cSld>
-    <p:bg>
-      <p:bgRef idx="1001">
-        <a:schemeClr val="bg1"/>
-      </p:bgRef>
-    </p:bg>
-    <p:spTree>
-      <p:nvGrpSpPr>
-        <p:cNvPr id="1" name=""/>
-        <p:cNvGrpSpPr/>
-        <p:nvPr/>
-      </p:nvGrpSpPr>
-      <p:grpSpPr>
-        <a:xfrm>
-          <a:off x="0" y="0"/>
-          <a:ext cx="0" cy="0"/>
-          <a:chOff x="0" y="0"/>
-          <a:chExt cx="0" cy="0"/>
-        </a:xfrm>
-      </p:grpSpPr>
-      <p:sp>
-        <p:nvSpPr>
-          <p:cNvPr id="2" name="Header Placeholder 1"/>
-          <p:cNvSpPr>
-            <a:spLocks noGrp="1"/>
-          </p:cNvSpPr>
-          <p:nvPr>
-            <p:ph type="hdr" sz="quarter"/>
-          </p:nvPr>
-        </p:nvSpPr>
-        <p:spPr>
-          <a:xfrm>
-            <a:off x="0" y="0"/>
-            <a:ext cx="2971800" cy="458788"/>
-          </a:xfrm>
-          <a:prstGeom prst="rect">
-            <a:avLst/>
-          </a:prstGeom>
-        </p:spPr>
-        <p:txBody>
-          <a:bodyPr vert="horz" lIns="91440" tIns="45720" rIns="91440" bIns="45720" rtlCol="0"/>
-          <a:lstStyle>
-            <a:lvl1pPr algn="l">
-              <a:defRPr sz="1200"/>
-            </a:lvl1pPr>
-          </a:lstStyle>
-          <a:p>
-            <a:endParaRPr lang="en-GB"/>
-          </a:p>
-        </p:txBody>
-      </p:sp>
-      <p:sp>
-        <p:nvSpPr>
-          <p:cNvPr id="3" name="Date Placeholder 2"/>
-          <p:cNvSpPr>
-            <a:spLocks noGrp="1"/>
-          </p:cNvSpPr>
-          <p:nvPr>
-            <p:ph type="dt" idx="1"/>
-          </p:nvPr>
-        </p:nvSpPr>
-        <p:spPr>
-          <a:xfrm>
-            <a:off x="3884613" y="0"/>
-            <a:ext cx="2971800" cy="458788"/>
-          </a:xfrm>
-          <a:prstGeom prst="rect">
-            <a:avLst/>
-          </a:prstGeom>
-        </p:spPr>
-        <p:txBody>
-          <a:bodyPr vert="horz" lIns="91440" tIns="45720" rIns="91440" bIns="45720" rtlCol="0"/>
-          <a:lstStyle>
-            <a:lvl1pPr algn="r">
-              <a:defRPr sz="1200"/>
-            </a:lvl1pPr>
-          </a:lstStyle>
-          <a:p>
-            <a:fld id="{7918E75B-70E9-4A86-ADB4-F4DD310B279F}" type="datetimeFigureOut">
-              <a:rPr lang="en-GB" smtClean="0"/>
-              <a:t>18/08/2026</a:t>
-            </a:fld>
-            <a:endParaRPr lang="en-GB"/>
-          </a:p>
-        </p:txBody>
-      </p:sp>
-      <p:sp>
-        <p:nvSpPr>
-          <p:cNvPr id="4" name="Slide Image Placeholder 3"/>
-          <p:cNvSpPr>
-            <a:spLocks noGrp="1" noRot="1" noChangeAspect="1"/>
-          </p:cNvSpPr>
-          <p:nvPr>
-            <p:ph type="sldImg" idx="2"/>
-          </p:nvPr>
-        </p:nvSpPr>
-        <p:spPr>
-          <a:xfrm>
-            <a:off x="120650" y="1143000"/>
-            <a:ext cx="6616700" cy="3086100"/>
-          </a:xfrm>
-          <a:prstGeom prst="rect">
-            <a:avLst/>
-          </a:prstGeom>
-          <a:noFill/>
-          <a:ln w="12700">
-            <a:solidFill>
-              <a:prstClr val="black"/>
-            </a:solidFill>
-          </a:ln>
-        </p:spPr>
-        <p:txBody>
-          <a:bodyPr vert="horz" lIns="91440" tIns="45720" rIns="91440" bIns="45720" rtlCol="0" anchor="ctr"/>
-          <a:lstStyle/>
-          <a:p>
-            <a:endParaRPr lang="en-GB"/>
-          </a:p>
-        </p:txBody>
-      </p:sp>
-      <p:sp>
-        <p:nvSpPr>
-          <p:cNvPr id="5" name="Notes Placeholder 4"/>
-          <p:cNvSpPr>
-            <a:spLocks noGrp="1"/>
-          </p:cNvSpPr>
-          <p:nvPr>
-            <p:ph type="body" sz="quarter" idx="3"/>
-          </p:nvPr>
-        </p:nvSpPr>
-        <p:spPr>
-          <a:xfrm>
-            <a:off x="685800" y="4400550"/>
-            <a:ext cx="5486400" cy="3600450"/>
-          </a:xfrm>
-          <a:prstGeom prst="rect">
-            <a:avLst/>
-          </a:prstGeom>
-        </p:spPr>
-        <p:txBody>
-          <a:bodyPr vert="horz" lIns="91440" tIns="45720" rIns="91440" bIns="45720" rtlCol="0"/>
-          <a:lstStyle/>
-          <a:p>
-            <a:pPr lvl="0"/>
-            <a:r>
-              <a:rPr lang="en-US"/>
-              <a:t>Click to edit Master text styles</a:t>
-            </a:r>
-          </a:p>
-          <a:p>
-            <a:pPr lvl="1"/>
-            <a:r>
-              <a:rPr lang="en-US"/>
-              <a:t>Second level</a:t>
-            </a:r>
-          </a:p>
-          <a:p>
-            <a:pPr lvl="2"/>
-            <a:r>
-              <a:rPr lang="en-US"/>
-              <a:t>Third level</a:t>
-            </a:r>
-          </a:p>
-          <a:p>
-            <a:pPr lvl="3"/>
-            <a:r>
-              <a:rPr lang="en-US"/>
-              <a:t>Fourth level</a:t>
-            </a:r>
-          </a:p>
-          <a:p>
-            <a:pPr lvl="4"/>
-            <a:r>
-              <a:rPr lang="en-US"/>
-              <a:t>Fifth level</a:t>
-            </a:r>
-            <a:endParaRPr lang="en-GB"/>
-          </a:p>
-        </p:txBody>
-      </p:sp>
-      <p:sp>
-        <p:nvSpPr>
-          <p:cNvPr id="6" name="Footer Placeholder 5"/>
-          <p:cNvSpPr>
-            <a:spLocks noGrp="1"/>
-          </p:cNvSpPr>
-          <p:nvPr>
-            <p:ph type="ftr" sz="quarter" idx="4"/>
-          </p:nvPr>
-        </p:nvSpPr>
-        <p:spPr>
-          <a:xfrm>
-            <a:off x="0" y="8685213"/>
-            <a:ext cx="2971800" cy="458787"/>
-          </a:xfrm>
-          <a:prstGeom prst="rect">
-            <a:avLst/>
-          </a:prstGeom>
-        </p:spPr>
-        <p:txBody>
-          <a:bodyPr vert="horz" lIns="91440" tIns="45720" rIns="91440" bIns="45720" rtlCol="0" anchor="b"/>
-          <a:lstStyle>
-            <a:lvl1pPr algn="l">
-              <a:defRPr sz="1200"/>
-            </a:lvl1pPr>
-          </a:lstStyle>
-          <a:p>
-            <a:endParaRPr lang="en-GB"/>
-          </a:p>
-        </p:txBody>
-      </p:sp>
-      <p:sp>
-        <p:nvSpPr>
-          <p:cNvPr id="7" name="Slide Number Placeholder 6"/>
-          <p:cNvSpPr>
-            <a:spLocks noGrp="1"/>
-          </p:cNvSpPr>
-          <p:nvPr>
-            <p:ph type="sldNum" sz="quarter" idx="5"/>
-          </p:nvPr>
-        </p:nvSpPr>
-        <p:spPr>
-          <a:xfrm>
-            <a:off x="3884613" y="8685213"/>
-            <a:ext cx="2971800" cy="458787"/>
-          </a:xfrm>
-          <a:prstGeom prst="rect">
-            <a:avLst/>
-          </a:prstGeom>
-        </p:spPr>
-        <p:txBody>
-          <a:bodyPr vert="horz" lIns="91440" tIns="45720" rIns="91440" bIns="45720" rtlCol="0" anchor="b"/>
-          <a:lstStyle>
-            <a:lvl1pPr algn="r">
-              <a:defRPr sz="1200"/>
-            </a:lvl1pPr>
-          </a:lstStyle>
-          <a:p>
-            <a:fld id="{EEEB5AB2-0591-4F6C-8122-50FAD6FC287A}" type="slidenum">
-              <a:rPr lang="en-GB" smtClean="0"/>
-              <a:t>‹#›</a:t>
-            </a:fld>
-            <a:endParaRPr lang="en-GB"/>
-          </a:p>
-        </p:txBody>
-      </p:sp>
-    </p:spTree>
-    <p:extLst>
-      <p:ext uri="{BB962C8B-B14F-4D97-AF65-F5344CB8AC3E}">
-        <p14:creationId xmlns:p14="http://schemas.microsoft.com/office/powerpoint/2010/main" val="4256598727"/>
-      </p:ext>
-    </p:extLst>
-  </p:cSld>
-  <p:clrMap bg1="lt1" tx1="dk1" bg2="lt2" tx2="dk2" accent1="accent1" accent2="accent2" accent3="accent3" accent4="accent4" accent5="accent5" accent6="accent6" hlink="hlink" folHlink="folHlink"/>
-  <p:notesStyle>
-    <a:lvl1pPr marL="0" algn="l" defTabSz="914400" rtl="0" eaLnBrk="1" latinLnBrk="0" hangingPunct="1">
-      <a:defRPr sz="1200" kern="1200">
-        <a:solidFill>
-          <a:schemeClr val="tx1"/>
-        </a:solidFill>
-        <a:latin typeface="+mn-lt"/>
-        <a:ea typeface="+mn-ea"/>
-        <a:cs typeface="+mn-cs"/>
-      </a:defRPr>
-    </a:lvl1pPr>
-    <a:lvl2pPr marL="457200" algn="l" defTabSz="914400" rtl="0" eaLnBrk="1" latinLnBrk="0" hangingPunct="1">
-      <a:defRPr sz="1200" kern="1200">
-        <a:solidFill>
-          <a:schemeClr val="tx1"/>
-        </a:solidFill>
-        <a:latin typeface="+mn-lt"/>
-        <a:ea typeface="+mn-ea"/>
-        <a:cs typeface="+mn-cs"/>
-      </a:defRPr>
-    </a:lvl2pPr>
-    <a:lvl3pPr marL="914400" algn="l" defTabSz="914400" rtl="0" eaLnBrk="1" latinLnBrk="0" hangingPunct="1">
-      <a:defRPr sz="1200" kern="1200">
-        <a:solidFill>
-          <a:schemeClr val="tx1"/>
-        </a:solidFill>
-        <a:latin typeface="+mn-lt"/>
-        <a:ea typeface="+mn-ea"/>
-        <a:cs typeface="+mn-cs"/>
-      </a:defRPr>
-    </a:lvl3pPr>
-    <a:lvl4pPr marL="1371600" algn="l" defTabSz="914400" rtl="0" eaLnBrk="1" latinLnBrk="0" hangingPunct="1">
-      <a:defRPr sz="1200" kern="1200">
-        <a:solidFill>
-          <a:schemeClr val="tx1"/>
-        </a:solidFill>
-        <a:latin typeface="+mn-lt"/>
-        <a:ea typeface="+mn-ea"/>
-        <a:cs typeface="+mn-cs"/>
-      </a:defRPr>
-    </a:lvl4pPr>
-    <a:lvl5pPr marL="1828800" algn="l" defTabSz="914400" rtl="0" eaLnBrk="1" latinLnBrk="0" hangingPunct="1">
-      <a:defRPr sz="1200" kern="1200">
-        <a:solidFill>
-          <a:schemeClr val="tx1"/>
-        </a:solidFill>
-        <a:latin typeface="+mn-lt"/>
-        <a:ea typeface="+mn-ea"/>
-        <a:cs typeface="+mn-cs"/>
-      </a:defRPr>
-    </a:lvl5pPr>
-    <a:lvl6pPr marL="2286000" algn="l" defTabSz="914400" rtl="0" eaLnBrk="1" latinLnBrk="0" hangingPunct="1">
-      <a:defRPr sz="1200" kern="1200">
-        <a:solidFill>
-          <a:schemeClr val="tx1"/>
-        </a:solidFill>
-        <a:latin typeface="+mn-lt"/>
-        <a:ea typeface="+mn-ea"/>
-        <a:cs typeface="+mn-cs"/>
-      </a:defRPr>
-    </a:lvl6pPr>
-    <a:lvl7pPr marL="2743200" algn="l" defTabSz="914400" rtl="0" eaLnBrk="1" latinLnBrk="0" hangingPunct="1">
-      <a:defRPr sz="1200" kern="1200">
-        <a:solidFill>
-          <a:schemeClr val="tx1"/>
-        </a:solidFill>
-        <a:latin typeface="+mn-lt"/>
-        <a:ea typeface="+mn-ea"/>
-        <a:cs typeface="+mn-cs"/>
-      </a:defRPr>
-    </a:lvl7pPr>
-    <a:lvl8pPr marL="3200400" algn="l" defTabSz="914400" rtl="0" eaLnBrk="1" latinLnBrk="0" hangingPunct="1">
-      <a:defRPr sz="1200" kern="1200">
-        <a:solidFill>
-          <a:schemeClr val="tx1"/>
-        </a:solidFill>
-        <a:latin typeface="+mn-lt"/>
-        <a:ea typeface="+mn-ea"/>
-        <a:cs typeface="+mn-cs"/>
-      </a:defRPr>
-    </a:lvl8pPr>
-    <a:lvl9pPr marL="3657600" algn="l" defTabSz="914400" rtl="0" eaLnBrk="1" latinLnBrk="0" hangingPunct="1">
-      <a:defRPr sz="1200" kern="1200">
-        <a:solidFill>
-          <a:schemeClr val="tx1"/>
-        </a:solidFill>
-        <a:latin typeface="+mn-lt"/>
-        <a:ea typeface="+mn-ea"/>
-        <a:cs typeface="+mn-cs"/>
-      </a:defRPr>
-    </a:lvl9pPr>
-  </p:notesStyle>
-</p:notesMaster>
-</file>
-
-<file path=ppt/notesSlides/notesSlide1.xml><?xml version="1.0" encoding="utf-8"?>
-<p:notes xmlns:a="http://schemas.openxmlformats.org/drawingml/2006/main" xmlns:r="http://schemas.openxmlformats.org/officeDocument/2006/relationships" xmlns:p="http://schemas.openxmlformats.org/presentationml/2006/main">
-  <p:cSld>
-    <p:spTree>
-      <p:nvGrpSpPr>
-        <p:cNvPr id="1" name=""/>
-        <p:cNvGrpSpPr/>
-        <p:nvPr/>
-      </p:nvGrpSpPr>
-      <p:grpSpPr>
-        <a:xfrm>
-          <a:off x="0" y="0"/>
-          <a:ext cx="0" cy="0"/>
-          <a:chOff x="0" y="0"/>
-          <a:chExt cx="0" cy="0"/>
-        </a:xfrm>
-      </p:grpSpPr>
-      <p:sp>
-        <p:nvSpPr>
-          <p:cNvPr id="2" name="Slide Image Placeholder 1"/>
-          <p:cNvSpPr>
-            <a:spLocks noGrp="1" noRot="1" noChangeAspect="1"/>
-          </p:cNvSpPr>
-          <p:nvPr>
-            <p:ph type="sldImg"/>
-          </p:nvPr>
-        </p:nvSpPr>
-        <p:spPr/>
-      </p:sp>
-      <p:sp>
-        <p:nvSpPr>
-          <p:cNvPr id="3" name="Notes Placeholder 2"/>
-          <p:cNvSpPr>
-            <a:spLocks noGrp="1"/>
-          </p:cNvSpPr>
-          <p:nvPr>
-            <p:ph type="body" idx="1"/>
-          </p:nvPr>
-        </p:nvSpPr>
-        <p:spPr/>
-        <p:txBody>
-          <a:bodyPr/>
-          <a:lstStyle/>
-          <a:p>
-            <a:endParaRPr lang="en-GB" dirty="0"/>
-          </a:p>
-        </p:txBody>
-      </p:sp>
-      <p:sp>
-        <p:nvSpPr>
-          <p:cNvPr id="4" name="Slide Number Placeholder 3"/>
-          <p:cNvSpPr>
-            <a:spLocks noGrp="1"/>
-          </p:cNvSpPr>
-          <p:nvPr>
-            <p:ph type="sldNum" sz="quarter" idx="5"/>
-          </p:nvPr>
-        </p:nvSpPr>
-        <p:spPr/>
-        <p:txBody>
-          <a:bodyPr/>
-          <a:lstStyle/>
-          <a:p>
-            <a:fld id="{EEEB5AB2-0591-4F6C-8122-50FAD6FC287A}" type="slidenum">
-              <a:rPr lang="en-GB" smtClean="0"/>
-              <a:t>1</a:t>
-            </a:fld>
-            <a:endParaRPr lang="en-GB"/>
-          </a:p>
-        </p:txBody>
-      </p:sp>
-    </p:spTree>
-    <p:extLst>
-      <p:ext uri="{BB962C8B-B14F-4D97-AF65-F5344CB8AC3E}">
-        <p14:creationId xmlns:p14="http://schemas.microsoft.com/office/powerpoint/2010/main" val="445462743"/>
-      </p:ext>
-    </p:extLst>
-  </p:cSld>
-  <p:clrMapOvr>
-    <a:masterClrMapping/>
-  </p:clrMapOvr>
-</p:notes>
 </file>
 
 <file path=ppt/slideLayouts/slideLayout1.xml><?xml version="1.0" encoding="utf-8"?>
@@ -611,9 +155,10 @@
           <a:lstStyle/>
           <a:p>
             <a:r>
-              <a:rPr lang="en-US"/>
+              <a:rPr lang="en-US" smtClean="0"/>
               <a:t>Click to edit Master title style</a:t>
             </a:r>
+            <a:endParaRPr lang="en-US"/>
           </a:p>
         </p:txBody>
       </p:sp>
@@ -729,9 +274,10 @@
           </a:lstStyle>
           <a:p>
             <a:r>
-              <a:rPr lang="en-US"/>
+              <a:rPr lang="en-US" smtClean="0"/>
               <a:t>Click to edit Master subtitle style</a:t>
             </a:r>
+            <a:endParaRPr lang="en-US"/>
           </a:p>
         </p:txBody>
       </p:sp>
@@ -753,7 +299,7 @@
             <a:fld id="{1D8BD707-D9CF-40AE-B4C6-C98DA3205C09}" type="datetimeFigureOut">
               <a:rPr lang="en-US" smtClean="0"/>
               <a:pPr/>
-              <a:t>8/18/2026</a:t>
+              <a:t>8/1/2011</a:t>
             </a:fld>
             <a:endParaRPr lang="en-US"/>
           </a:p>
@@ -843,9 +389,10 @@
           <a:lstStyle/>
           <a:p>
             <a:r>
-              <a:rPr lang="en-US"/>
+              <a:rPr lang="en-US" smtClean="0"/>
               <a:t>Click to edit Master title style</a:t>
             </a:r>
+            <a:endParaRPr lang="en-US"/>
           </a:p>
         </p:txBody>
       </p:sp>
@@ -866,37 +413,38 @@
           <a:p>
             <a:pPr lvl="0"/>
             <a:r>
-              <a:rPr lang="en-US"/>
+              <a:rPr lang="en-US" smtClean="0"/>
               <a:t>Click to edit Master text styles</a:t>
             </a:r>
           </a:p>
           <a:p>
             <a:pPr lvl="1"/>
             <a:r>
-              <a:rPr lang="en-US"/>
+              <a:rPr lang="en-US" smtClean="0"/>
               <a:t>Second level</a:t>
             </a:r>
           </a:p>
           <a:p>
             <a:pPr lvl="2"/>
             <a:r>
-              <a:rPr lang="en-US"/>
+              <a:rPr lang="en-US" smtClean="0"/>
               <a:t>Third level</a:t>
             </a:r>
           </a:p>
           <a:p>
             <a:pPr lvl="3"/>
             <a:r>
-              <a:rPr lang="en-US"/>
+              <a:rPr lang="en-US" smtClean="0"/>
               <a:t>Fourth level</a:t>
             </a:r>
           </a:p>
           <a:p>
             <a:pPr lvl="4"/>
             <a:r>
-              <a:rPr lang="en-US"/>
+              <a:rPr lang="en-US" smtClean="0"/>
               <a:t>Fifth level</a:t>
             </a:r>
+            <a:endParaRPr lang="en-US"/>
           </a:p>
         </p:txBody>
       </p:sp>
@@ -918,7 +466,7 @@
             <a:fld id="{1D8BD707-D9CF-40AE-B4C6-C98DA3205C09}" type="datetimeFigureOut">
               <a:rPr lang="en-US" smtClean="0"/>
               <a:pPr/>
-              <a:t>8/18/2026</a:t>
+              <a:t>8/1/2011</a:t>
             </a:fld>
             <a:endParaRPr lang="en-US"/>
           </a:p>
@@ -1013,9 +561,10 @@
           <a:lstStyle/>
           <a:p>
             <a:r>
-              <a:rPr lang="en-US"/>
+              <a:rPr lang="en-US" smtClean="0"/>
               <a:t>Click to edit Master title style</a:t>
             </a:r>
+            <a:endParaRPr lang="en-US"/>
           </a:p>
         </p:txBody>
       </p:sp>
@@ -1041,37 +590,38 @@
           <a:p>
             <a:pPr lvl="0"/>
             <a:r>
-              <a:rPr lang="en-US"/>
+              <a:rPr lang="en-US" smtClean="0"/>
               <a:t>Click to edit Master text styles</a:t>
             </a:r>
           </a:p>
           <a:p>
             <a:pPr lvl="1"/>
             <a:r>
-              <a:rPr lang="en-US"/>
+              <a:rPr lang="en-US" smtClean="0"/>
               <a:t>Second level</a:t>
             </a:r>
           </a:p>
           <a:p>
             <a:pPr lvl="2"/>
             <a:r>
-              <a:rPr lang="en-US"/>
+              <a:rPr lang="en-US" smtClean="0"/>
               <a:t>Third level</a:t>
             </a:r>
           </a:p>
           <a:p>
             <a:pPr lvl="3"/>
             <a:r>
-              <a:rPr lang="en-US"/>
+              <a:rPr lang="en-US" smtClean="0"/>
               <a:t>Fourth level</a:t>
             </a:r>
           </a:p>
           <a:p>
             <a:pPr lvl="4"/>
             <a:r>
-              <a:rPr lang="en-US"/>
+              <a:rPr lang="en-US" smtClean="0"/>
               <a:t>Fifth level</a:t>
             </a:r>
+            <a:endParaRPr lang="en-US"/>
           </a:p>
         </p:txBody>
       </p:sp>
@@ -1093,7 +643,7 @@
             <a:fld id="{1D8BD707-D9CF-40AE-B4C6-C98DA3205C09}" type="datetimeFigureOut">
               <a:rPr lang="en-US" smtClean="0"/>
               <a:pPr/>
-              <a:t>8/18/2026</a:t>
+              <a:t>8/1/2011</a:t>
             </a:fld>
             <a:endParaRPr lang="en-US"/>
           </a:p>
@@ -1183,9 +733,10 @@
           <a:lstStyle/>
           <a:p>
             <a:r>
-              <a:rPr lang="en-US"/>
+              <a:rPr lang="en-US" smtClean="0"/>
               <a:t>Click to edit Master title style</a:t>
             </a:r>
+            <a:endParaRPr lang="en-US"/>
           </a:p>
         </p:txBody>
       </p:sp>
@@ -1206,37 +757,38 @@
           <a:p>
             <a:pPr lvl="0"/>
             <a:r>
-              <a:rPr lang="en-US"/>
+              <a:rPr lang="en-US" smtClean="0"/>
               <a:t>Click to edit Master text styles</a:t>
             </a:r>
           </a:p>
           <a:p>
             <a:pPr lvl="1"/>
             <a:r>
-              <a:rPr lang="en-US"/>
+              <a:rPr lang="en-US" smtClean="0"/>
               <a:t>Second level</a:t>
             </a:r>
           </a:p>
           <a:p>
             <a:pPr lvl="2"/>
             <a:r>
-              <a:rPr lang="en-US"/>
+              <a:rPr lang="en-US" smtClean="0"/>
               <a:t>Third level</a:t>
             </a:r>
           </a:p>
           <a:p>
             <a:pPr lvl="3"/>
             <a:r>
-              <a:rPr lang="en-US"/>
+              <a:rPr lang="en-US" smtClean="0"/>
               <a:t>Fourth level</a:t>
             </a:r>
           </a:p>
           <a:p>
             <a:pPr lvl="4"/>
             <a:r>
-              <a:rPr lang="en-US"/>
+              <a:rPr lang="en-US" smtClean="0"/>
               <a:t>Fifth level</a:t>
             </a:r>
+            <a:endParaRPr lang="en-US"/>
           </a:p>
         </p:txBody>
       </p:sp>
@@ -1258,7 +810,7 @@
             <a:fld id="{1D8BD707-D9CF-40AE-B4C6-C98DA3205C09}" type="datetimeFigureOut">
               <a:rPr lang="en-US" smtClean="0"/>
               <a:pPr/>
-              <a:t>8/18/2026</a:t>
+              <a:t>8/1/2011</a:t>
             </a:fld>
             <a:endParaRPr lang="en-US"/>
           </a:p>
@@ -1357,9 +909,10 @@
           </a:lstStyle>
           <a:p>
             <a:r>
-              <a:rPr lang="en-US"/>
+              <a:rPr lang="en-US" smtClean="0"/>
               <a:t>Click to edit Master title style</a:t>
             </a:r>
+            <a:endParaRPr lang="en-US"/>
           </a:p>
         </p:txBody>
       </p:sp>
@@ -1476,7 +1029,7 @@
           <a:p>
             <a:pPr lvl="0"/>
             <a:r>
-              <a:rPr lang="en-US"/>
+              <a:rPr lang="en-US" smtClean="0"/>
               <a:t>Click to edit Master text styles</a:t>
             </a:r>
           </a:p>
@@ -1500,7 +1053,7 @@
             <a:fld id="{1D8BD707-D9CF-40AE-B4C6-C98DA3205C09}" type="datetimeFigureOut">
               <a:rPr lang="en-US" smtClean="0"/>
               <a:pPr/>
-              <a:t>8/18/2026</a:t>
+              <a:t>8/1/2011</a:t>
             </a:fld>
             <a:endParaRPr lang="en-US"/>
           </a:p>
@@ -1590,9 +1143,10 @@
           <a:lstStyle/>
           <a:p>
             <a:r>
-              <a:rPr lang="en-US"/>
+              <a:rPr lang="en-US" smtClean="0"/>
               <a:t>Click to edit Master title style</a:t>
             </a:r>
+            <a:endParaRPr lang="en-US"/>
           </a:p>
         </p:txBody>
       </p:sp>
@@ -1646,37 +1200,38 @@
           <a:p>
             <a:pPr lvl="0"/>
             <a:r>
-              <a:rPr lang="en-US"/>
+              <a:rPr lang="en-US" smtClean="0"/>
               <a:t>Click to edit Master text styles</a:t>
             </a:r>
           </a:p>
           <a:p>
             <a:pPr lvl="1"/>
             <a:r>
-              <a:rPr lang="en-US"/>
+              <a:rPr lang="en-US" smtClean="0"/>
               <a:t>Second level</a:t>
             </a:r>
           </a:p>
           <a:p>
             <a:pPr lvl="2"/>
             <a:r>
-              <a:rPr lang="en-US"/>
+              <a:rPr lang="en-US" smtClean="0"/>
               <a:t>Third level</a:t>
             </a:r>
           </a:p>
           <a:p>
             <a:pPr lvl="3"/>
             <a:r>
-              <a:rPr lang="en-US"/>
+              <a:rPr lang="en-US" smtClean="0"/>
               <a:t>Fourth level</a:t>
             </a:r>
           </a:p>
           <a:p>
             <a:pPr lvl="4"/>
             <a:r>
-              <a:rPr lang="en-US"/>
+              <a:rPr lang="en-US" smtClean="0"/>
               <a:t>Fifth level</a:t>
             </a:r>
+            <a:endParaRPr lang="en-US"/>
           </a:p>
         </p:txBody>
       </p:sp>
@@ -1730,37 +1285,38 @@
           <a:p>
             <a:pPr lvl="0"/>
             <a:r>
-              <a:rPr lang="en-US"/>
+              <a:rPr lang="en-US" smtClean="0"/>
               <a:t>Click to edit Master text styles</a:t>
             </a:r>
           </a:p>
           <a:p>
             <a:pPr lvl="1"/>
             <a:r>
-              <a:rPr lang="en-US"/>
+              <a:rPr lang="en-US" smtClean="0"/>
               <a:t>Second level</a:t>
             </a:r>
           </a:p>
           <a:p>
             <a:pPr lvl="2"/>
             <a:r>
-              <a:rPr lang="en-US"/>
+              <a:rPr lang="en-US" smtClean="0"/>
               <a:t>Third level</a:t>
             </a:r>
           </a:p>
           <a:p>
             <a:pPr lvl="3"/>
             <a:r>
-              <a:rPr lang="en-US"/>
+              <a:rPr lang="en-US" smtClean="0"/>
               <a:t>Fourth level</a:t>
             </a:r>
           </a:p>
           <a:p>
             <a:pPr lvl="4"/>
             <a:r>
-              <a:rPr lang="en-US"/>
+              <a:rPr lang="en-US" smtClean="0"/>
               <a:t>Fifth level</a:t>
             </a:r>
+            <a:endParaRPr lang="en-US"/>
           </a:p>
         </p:txBody>
       </p:sp>
@@ -1782,7 +1338,7 @@
             <a:fld id="{1D8BD707-D9CF-40AE-B4C6-C98DA3205C09}" type="datetimeFigureOut">
               <a:rPr lang="en-US" smtClean="0"/>
               <a:pPr/>
-              <a:t>8/18/2026</a:t>
+              <a:t>8/1/2011</a:t>
             </a:fld>
             <a:endParaRPr lang="en-US"/>
           </a:p>
@@ -1876,9 +1432,10 @@
           </a:lstStyle>
           <a:p>
             <a:r>
-              <a:rPr lang="en-US"/>
+              <a:rPr lang="en-US" smtClean="0"/>
               <a:t>Click to edit Master title style</a:t>
             </a:r>
+            <a:endParaRPr lang="en-US"/>
           </a:p>
         </p:txBody>
       </p:sp>
@@ -1941,7 +1498,7 @@
           <a:p>
             <a:pPr lvl="0"/>
             <a:r>
-              <a:rPr lang="en-US"/>
+              <a:rPr lang="en-US" smtClean="0"/>
               <a:t>Click to edit Master text styles</a:t>
             </a:r>
           </a:p>
@@ -1997,37 +1554,38 @@
           <a:p>
             <a:pPr lvl="0"/>
             <a:r>
-              <a:rPr lang="en-US"/>
+              <a:rPr lang="en-US" smtClean="0"/>
               <a:t>Click to edit Master text styles</a:t>
             </a:r>
           </a:p>
           <a:p>
             <a:pPr lvl="1"/>
             <a:r>
-              <a:rPr lang="en-US"/>
+              <a:rPr lang="en-US" smtClean="0"/>
               <a:t>Second level</a:t>
             </a:r>
           </a:p>
           <a:p>
             <a:pPr lvl="2"/>
             <a:r>
-              <a:rPr lang="en-US"/>
+              <a:rPr lang="en-US" smtClean="0"/>
               <a:t>Third level</a:t>
             </a:r>
           </a:p>
           <a:p>
             <a:pPr lvl="3"/>
             <a:r>
-              <a:rPr lang="en-US"/>
+              <a:rPr lang="en-US" smtClean="0"/>
               <a:t>Fourth level</a:t>
             </a:r>
           </a:p>
           <a:p>
             <a:pPr lvl="4"/>
             <a:r>
-              <a:rPr lang="en-US"/>
+              <a:rPr lang="en-US" smtClean="0"/>
               <a:t>Fifth level</a:t>
             </a:r>
+            <a:endParaRPr lang="en-US"/>
           </a:p>
         </p:txBody>
       </p:sp>
@@ -2090,7 +1648,7 @@
           <a:p>
             <a:pPr lvl="0"/>
             <a:r>
-              <a:rPr lang="en-US"/>
+              <a:rPr lang="en-US" smtClean="0"/>
               <a:t>Click to edit Master text styles</a:t>
             </a:r>
           </a:p>
@@ -2146,37 +1704,38 @@
           <a:p>
             <a:pPr lvl="0"/>
             <a:r>
-              <a:rPr lang="en-US"/>
+              <a:rPr lang="en-US" smtClean="0"/>
               <a:t>Click to edit Master text styles</a:t>
             </a:r>
           </a:p>
           <a:p>
             <a:pPr lvl="1"/>
             <a:r>
-              <a:rPr lang="en-US"/>
+              <a:rPr lang="en-US" smtClean="0"/>
               <a:t>Second level</a:t>
             </a:r>
           </a:p>
           <a:p>
             <a:pPr lvl="2"/>
             <a:r>
-              <a:rPr lang="en-US"/>
+              <a:rPr lang="en-US" smtClean="0"/>
               <a:t>Third level</a:t>
             </a:r>
           </a:p>
           <a:p>
             <a:pPr lvl="3"/>
             <a:r>
-              <a:rPr lang="en-US"/>
+              <a:rPr lang="en-US" smtClean="0"/>
               <a:t>Fourth level</a:t>
             </a:r>
           </a:p>
           <a:p>
             <a:pPr lvl="4"/>
             <a:r>
-              <a:rPr lang="en-US"/>
+              <a:rPr lang="en-US" smtClean="0"/>
               <a:t>Fifth level</a:t>
             </a:r>
+            <a:endParaRPr lang="en-US"/>
           </a:p>
         </p:txBody>
       </p:sp>
@@ -2198,7 +1757,7 @@
             <a:fld id="{1D8BD707-D9CF-40AE-B4C6-C98DA3205C09}" type="datetimeFigureOut">
               <a:rPr lang="en-US" smtClean="0"/>
               <a:pPr/>
-              <a:t>8/18/2026</a:t>
+              <a:t>8/1/2011</a:t>
             </a:fld>
             <a:endParaRPr lang="en-US"/>
           </a:p>
@@ -2288,9 +1847,10 @@
           <a:lstStyle/>
           <a:p>
             <a:r>
-              <a:rPr lang="en-US"/>
+              <a:rPr lang="en-US" smtClean="0"/>
               <a:t>Click to edit Master title style</a:t>
             </a:r>
+            <a:endParaRPr lang="en-US"/>
           </a:p>
         </p:txBody>
       </p:sp>
@@ -2312,7 +1872,7 @@
             <a:fld id="{1D8BD707-D9CF-40AE-B4C6-C98DA3205C09}" type="datetimeFigureOut">
               <a:rPr lang="en-US" smtClean="0"/>
               <a:pPr/>
-              <a:t>8/18/2026</a:t>
+              <a:t>8/1/2011</a:t>
             </a:fld>
             <a:endParaRPr lang="en-US"/>
           </a:p>
@@ -2404,7 +1964,7 @@
             <a:fld id="{1D8BD707-D9CF-40AE-B4C6-C98DA3205C09}" type="datetimeFigureOut">
               <a:rPr lang="en-US" smtClean="0"/>
               <a:pPr/>
-              <a:t>8/18/2026</a:t>
+              <a:t>8/1/2011</a:t>
             </a:fld>
             <a:endParaRPr lang="en-US"/>
           </a:p>
@@ -2503,9 +2063,10 @@
           </a:lstStyle>
           <a:p>
             <a:r>
-              <a:rPr lang="en-US"/>
+              <a:rPr lang="en-US" smtClean="0"/>
               <a:t>Click to edit Master title style</a:t>
             </a:r>
+            <a:endParaRPr lang="en-US"/>
           </a:p>
         </p:txBody>
       </p:sp>
@@ -2559,37 +2120,38 @@
           <a:p>
             <a:pPr lvl="0"/>
             <a:r>
-              <a:rPr lang="en-US"/>
+              <a:rPr lang="en-US" smtClean="0"/>
               <a:t>Click to edit Master text styles</a:t>
             </a:r>
           </a:p>
           <a:p>
             <a:pPr lvl="1"/>
             <a:r>
-              <a:rPr lang="en-US"/>
+              <a:rPr lang="en-US" smtClean="0"/>
               <a:t>Second level</a:t>
             </a:r>
           </a:p>
           <a:p>
             <a:pPr lvl="2"/>
             <a:r>
-              <a:rPr lang="en-US"/>
+              <a:rPr lang="en-US" smtClean="0"/>
               <a:t>Third level</a:t>
             </a:r>
           </a:p>
           <a:p>
             <a:pPr lvl="3"/>
             <a:r>
-              <a:rPr lang="en-US"/>
+              <a:rPr lang="en-US" smtClean="0"/>
               <a:t>Fourth level</a:t>
             </a:r>
           </a:p>
           <a:p>
             <a:pPr lvl="4"/>
             <a:r>
-              <a:rPr lang="en-US"/>
+              <a:rPr lang="en-US" smtClean="0"/>
               <a:t>Fifth level</a:t>
             </a:r>
+            <a:endParaRPr lang="en-US"/>
           </a:p>
         </p:txBody>
       </p:sp>
@@ -2652,7 +2214,7 @@
           <a:p>
             <a:pPr lvl="0"/>
             <a:r>
-              <a:rPr lang="en-US"/>
+              <a:rPr lang="en-US" smtClean="0"/>
               <a:t>Click to edit Master text styles</a:t>
             </a:r>
           </a:p>
@@ -2676,7 +2238,7 @@
             <a:fld id="{1D8BD707-D9CF-40AE-B4C6-C98DA3205C09}" type="datetimeFigureOut">
               <a:rPr lang="en-US" smtClean="0"/>
               <a:pPr/>
-              <a:t>8/18/2026</a:t>
+              <a:t>8/1/2011</a:t>
             </a:fld>
             <a:endParaRPr lang="en-US"/>
           </a:p>
@@ -2775,9 +2337,10 @@
           </a:lstStyle>
           <a:p>
             <a:r>
-              <a:rPr lang="en-US"/>
+              <a:rPr lang="en-US" smtClean="0"/>
               <a:t>Click to edit Master title style</a:t>
             </a:r>
+            <a:endParaRPr lang="en-US"/>
           </a:p>
         </p:txBody>
       </p:sp>
@@ -2901,7 +2464,7 @@
           <a:p>
             <a:pPr lvl="0"/>
             <a:r>
-              <a:rPr lang="en-US"/>
+              <a:rPr lang="en-US" smtClean="0"/>
               <a:t>Click to edit Master text styles</a:t>
             </a:r>
           </a:p>
@@ -2925,7 +2488,7 @@
             <a:fld id="{1D8BD707-D9CF-40AE-B4C6-C98DA3205C09}" type="datetimeFigureOut">
               <a:rPr lang="en-US" smtClean="0"/>
               <a:pPr/>
-              <a:t>8/18/2026</a:t>
+              <a:t>8/1/2011</a:t>
             </a:fld>
             <a:endParaRPr lang="en-US"/>
           </a:p>
@@ -3030,9 +2593,10 @@
           <a:lstStyle/>
           <a:p>
             <a:r>
-              <a:rPr lang="en-US"/>
+              <a:rPr lang="en-US" smtClean="0"/>
               <a:t>Click to edit Master title style</a:t>
             </a:r>
+            <a:endParaRPr lang="en-US"/>
           </a:p>
         </p:txBody>
       </p:sp>
@@ -3063,37 +2627,38 @@
           <a:p>
             <a:pPr lvl="0"/>
             <a:r>
-              <a:rPr lang="en-US"/>
+              <a:rPr lang="en-US" smtClean="0"/>
               <a:t>Click to edit Master text styles</a:t>
             </a:r>
           </a:p>
           <a:p>
             <a:pPr lvl="1"/>
             <a:r>
-              <a:rPr lang="en-US"/>
+              <a:rPr lang="en-US" smtClean="0"/>
               <a:t>Second level</a:t>
             </a:r>
           </a:p>
           <a:p>
             <a:pPr lvl="2"/>
             <a:r>
-              <a:rPr lang="en-US"/>
+              <a:rPr lang="en-US" smtClean="0"/>
               <a:t>Third level</a:t>
             </a:r>
           </a:p>
           <a:p>
             <a:pPr lvl="3"/>
             <a:r>
-              <a:rPr lang="en-US"/>
+              <a:rPr lang="en-US" smtClean="0"/>
               <a:t>Fourth level</a:t>
             </a:r>
           </a:p>
           <a:p>
             <a:pPr lvl="4"/>
             <a:r>
-              <a:rPr lang="en-US"/>
+              <a:rPr lang="en-US" smtClean="0"/>
               <a:t>Fifth level</a:t>
             </a:r>
+            <a:endParaRPr lang="en-US"/>
           </a:p>
         </p:txBody>
       </p:sp>
@@ -3133,7 +2698,7 @@
             <a:fld id="{1D8BD707-D9CF-40AE-B4C6-C98DA3205C09}" type="datetimeFigureOut">
               <a:rPr lang="en-US" smtClean="0"/>
               <a:pPr/>
-              <a:t>8/18/2026</a:t>
+              <a:t>8/1/2011</a:t>
             </a:fld>
             <a:endParaRPr lang="en-US"/>
           </a:p>
@@ -3488,7 +3053,7 @@
 </file>
 
 <file path=ppt/slides/slide1.xml><?xml version="1.0" encoding="utf-8"?>
-<p:sld xmlns:a="http://schemas.openxmlformats.org/drawingml/2006/main" xmlns:r="http://schemas.openxmlformats.org/officeDocument/2006/relationships" xmlns:p="http://schemas.openxmlformats.org/presentationml/2006/main">
+<p:sld xmlns:p="http://schemas.openxmlformats.org/presentationml/2006/main" xmlns:a="http://schemas.openxmlformats.org/drawingml/2006/main" xmlns:r="http://schemas.openxmlformats.org/officeDocument/2006/relationships">
   <p:cSld>
     <p:spTree>
       <p:nvGrpSpPr>
@@ -3506,12 +3071,12 @@
       </p:grpSpPr>
       <p:sp>
         <p:nvSpPr>
-          <p:cNvPr id="2" name="Freeform 2"/>
+          <p:cNvPr name="Freeform 2" id="2"/>
           <p:cNvSpPr/>
           <p:nvPr/>
         </p:nvSpPr>
         <p:spPr>
-          <a:xfrm>
+          <a:xfrm flipH="false" flipV="false" rot="0">
             <a:off x="0" y="0"/>
             <a:ext cx="17487900" cy="8162925"/>
           </a:xfrm>
@@ -3520,9 +3085,9 @@
             <a:gdLst/>
             <a:ahLst/>
             <a:cxnLst/>
-            <a:rect l="l" t="t" r="r" b="b"/>
+            <a:rect r="r" b="b" t="t" l="l"/>
             <a:pathLst>
-              <a:path w="17487900" h="8162925">
+              <a:path h="8162925" w="17487900">
                 <a:moveTo>
                   <a:pt x="0" y="0"/>
                 </a:moveTo>
@@ -3534,6 +3099,52 @@
                 </a:lnTo>
                 <a:lnTo>
                   <a:pt x="0" y="8162925"/>
+                </a:lnTo>
+                <a:lnTo>
+                  <a:pt x="0" y="0"/>
+                </a:lnTo>
+                <a:close/>
+              </a:path>
+            </a:pathLst>
+          </a:custGeom>
+          <a:blipFill>
+            <a:blip r:embed="rId2"/>
+            <a:stretch>
+              <a:fillRect l="0" t="0" r="0" b="0"/>
+            </a:stretch>
+          </a:blipFill>
+        </p:spPr>
+      </p:sp>
+      <p:sp>
+        <p:nvSpPr>
+          <p:cNvPr name="Freeform 3" id="3"/>
+          <p:cNvSpPr/>
+          <p:nvPr/>
+        </p:nvSpPr>
+        <p:spPr>
+          <a:xfrm flipH="false" flipV="false" rot="0">
+            <a:off x="4933950" y="361950"/>
+            <a:ext cx="771525" cy="381000"/>
+          </a:xfrm>
+          <a:custGeom>
+            <a:avLst/>
+            <a:gdLst/>
+            <a:ahLst/>
+            <a:cxnLst/>
+            <a:rect r="r" b="b" t="t" l="l"/>
+            <a:pathLst>
+              <a:path h="381000" w="771525">
+                <a:moveTo>
+                  <a:pt x="0" y="0"/>
+                </a:moveTo>
+                <a:lnTo>
+                  <a:pt x="771525" y="0"/>
+                </a:lnTo>
+                <a:lnTo>
+                  <a:pt x="771525" y="381000"/>
+                </a:lnTo>
+                <a:lnTo>
+                  <a:pt x="0" y="381000"/>
                 </a:lnTo>
                 <a:lnTo>
                   <a:pt x="0" y="0"/>
@@ -3545,79 +3156,19 @@
           <a:blipFill>
             <a:blip r:embed="rId3"/>
             <a:stretch>
-              <a:fillRect/>
+              <a:fillRect l="0" t="0" r="0" b="0"/>
             </a:stretch>
           </a:blipFill>
         </p:spPr>
-        <p:txBody>
-          <a:bodyPr/>
-          <a:lstStyle/>
-          <a:p>
-            <a:endParaRPr lang="en-GB" dirty="0"/>
-          </a:p>
-        </p:txBody>
-      </p:sp>
-      <p:sp>
-        <p:nvSpPr>
-          <p:cNvPr id="3" name="Freeform 3"/>
-          <p:cNvSpPr/>
-          <p:nvPr/>
-        </p:nvSpPr>
-        <p:spPr>
-          <a:xfrm>
-            <a:off x="4933950" y="361950"/>
-            <a:ext cx="771525" cy="381000"/>
-          </a:xfrm>
-          <a:custGeom>
-            <a:avLst/>
-            <a:gdLst/>
-            <a:ahLst/>
-            <a:cxnLst/>
-            <a:rect l="l" t="t" r="r" b="b"/>
-            <a:pathLst>
-              <a:path w="771525" h="381000">
-                <a:moveTo>
-                  <a:pt x="0" y="0"/>
-                </a:moveTo>
-                <a:lnTo>
-                  <a:pt x="771525" y="0"/>
-                </a:lnTo>
-                <a:lnTo>
-                  <a:pt x="771525" y="381000"/>
-                </a:lnTo>
-                <a:lnTo>
-                  <a:pt x="0" y="381000"/>
-                </a:lnTo>
-                <a:lnTo>
-                  <a:pt x="0" y="0"/>
-                </a:lnTo>
-                <a:close/>
-              </a:path>
-            </a:pathLst>
-          </a:custGeom>
-          <a:blipFill>
-            <a:blip r:embed="rId4"/>
-            <a:stretch>
-              <a:fillRect/>
-            </a:stretch>
-          </a:blipFill>
-        </p:spPr>
-        <p:txBody>
-          <a:bodyPr/>
-          <a:lstStyle/>
-          <a:p>
-            <a:endParaRPr lang="en-GB"/>
-          </a:p>
-        </p:txBody>
-      </p:sp>
-      <p:sp>
-        <p:nvSpPr>
-          <p:cNvPr id="4" name="TextBox 4"/>
-          <p:cNvSpPr txBox="1"/>
-          <p:nvPr/>
-        </p:nvSpPr>
-        <p:spPr>
-          <a:xfrm>
+      </p:sp>
+      <p:sp>
+        <p:nvSpPr>
+          <p:cNvPr name="TextBox 4" id="4"/>
+          <p:cNvSpPr txBox="true"/>
+          <p:nvPr/>
+        </p:nvSpPr>
+        <p:spPr>
+          <a:xfrm rot="0">
             <a:off x="349758" y="303282"/>
             <a:ext cx="12696215" cy="473675"/>
           </a:xfrm>
@@ -3626,7 +3177,7 @@
           </a:prstGeom>
         </p:spPr>
         <p:txBody>
-          <a:bodyPr lIns="0" tIns="0" rIns="0" bIns="0" rtlCol="0" anchor="t">
+          <a:bodyPr anchor="t" rtlCol="false" tIns="0" lIns="0" bIns="0" rIns="0">
             <a:spAutoFit/>
           </a:bodyPr>
           <a:lstStyle/>
@@ -3653,12 +3204,12 @@
       </p:sp>
       <p:sp>
         <p:nvSpPr>
-          <p:cNvPr id="5" name="TextBox 5"/>
-          <p:cNvSpPr txBox="1"/>
-          <p:nvPr/>
-        </p:nvSpPr>
-        <p:spPr>
-          <a:xfrm>
+          <p:cNvPr name="TextBox 5" id="5"/>
+          <p:cNvSpPr txBox="true"/>
+          <p:nvPr/>
+        </p:nvSpPr>
+        <p:spPr>
+          <a:xfrm rot="0">
             <a:off x="349758" y="990393"/>
             <a:ext cx="13745489" cy="235454"/>
           </a:xfrm>
@@ -3667,7 +3218,7 @@
           </a:prstGeom>
         </p:spPr>
         <p:txBody>
-          <a:bodyPr lIns="0" tIns="0" rIns="0" bIns="0" rtlCol="0" anchor="t">
+          <a:bodyPr anchor="t" rtlCol="false" tIns="0" lIns="0" bIns="0" rIns="0">
             <a:spAutoFit/>
           </a:bodyPr>
           <a:lstStyle/>
@@ -3694,12 +3245,12 @@
       </p:sp>
       <p:sp>
         <p:nvSpPr>
-          <p:cNvPr id="6" name="Freeform 6"/>
+          <p:cNvPr name="Freeform 6" id="6"/>
           <p:cNvSpPr/>
           <p:nvPr/>
         </p:nvSpPr>
         <p:spPr>
-          <a:xfrm>
+          <a:xfrm flipH="false" flipV="false" rot="0">
             <a:off x="180975" y="1666875"/>
             <a:ext cx="3629025" cy="190500"/>
           </a:xfrm>
@@ -3708,9 +3259,9 @@
             <a:gdLst/>
             <a:ahLst/>
             <a:cxnLst/>
-            <a:rect l="l" t="t" r="r" b="b"/>
+            <a:rect r="r" b="b" t="t" l="l"/>
             <a:pathLst>
-              <a:path w="3629025" h="190500">
+              <a:path h="190500" w="3629025">
                 <a:moveTo>
                   <a:pt x="0" y="0"/>
                 </a:moveTo>
@@ -3731,28 +3282,21 @@
             </a:pathLst>
           </a:custGeom>
           <a:blipFill>
-            <a:blip r:embed="rId5"/>
+            <a:blip r:embed="rId4"/>
             <a:stretch>
-              <a:fillRect/>
+              <a:fillRect l="0" t="0" r="0" b="0"/>
             </a:stretch>
           </a:blipFill>
         </p:spPr>
-        <p:txBody>
-          <a:bodyPr/>
-          <a:lstStyle/>
-          <a:p>
-            <a:endParaRPr lang="en-GB"/>
-          </a:p>
-        </p:txBody>
-      </p:sp>
-      <p:sp>
-        <p:nvSpPr>
-          <p:cNvPr id="7" name="TextBox 7"/>
-          <p:cNvSpPr txBox="1"/>
-          <p:nvPr/>
-        </p:nvSpPr>
-        <p:spPr>
-          <a:xfrm>
+      </p:sp>
+      <p:sp>
+        <p:nvSpPr>
+          <p:cNvPr name="TextBox 7" id="7"/>
+          <p:cNvSpPr txBox="true"/>
+          <p:nvPr/>
+        </p:nvSpPr>
+        <p:spPr>
+          <a:xfrm rot="0">
             <a:off x="3759898" y="1659752"/>
             <a:ext cx="4844148" cy="235454"/>
           </a:xfrm>
@@ -3761,7 +3305,7 @@
           </a:prstGeom>
         </p:spPr>
         <p:txBody>
-          <a:bodyPr lIns="0" tIns="0" rIns="0" bIns="0" rtlCol="0" anchor="t">
+          <a:bodyPr anchor="t" rtlCol="false" tIns="0" lIns="0" bIns="0" rIns="0">
             <a:spAutoFit/>
           </a:bodyPr>
           <a:lstStyle/>
@@ -3788,12 +3332,12 @@
       </p:sp>
       <p:sp>
         <p:nvSpPr>
-          <p:cNvPr id="8" name="Freeform 8"/>
+          <p:cNvPr name="Freeform 8" id="8"/>
           <p:cNvSpPr/>
           <p:nvPr/>
         </p:nvSpPr>
         <p:spPr>
-          <a:xfrm>
+          <a:xfrm flipH="false" flipV="false" rot="0">
             <a:off x="8553450" y="1666875"/>
             <a:ext cx="3238500" cy="190500"/>
           </a:xfrm>
@@ -3802,9 +3346,9 @@
             <a:gdLst/>
             <a:ahLst/>
             <a:cxnLst/>
-            <a:rect l="l" t="t" r="r" b="b"/>
+            <a:rect r="r" b="b" t="t" l="l"/>
             <a:pathLst>
-              <a:path w="3238500" h="190500">
+              <a:path h="190500" w="3238500">
                 <a:moveTo>
                   <a:pt x="0" y="0"/>
                 </a:moveTo>
@@ -3816,6 +3360,52 @@
                 </a:lnTo>
                 <a:lnTo>
                   <a:pt x="0" y="190500"/>
+                </a:lnTo>
+                <a:lnTo>
+                  <a:pt x="0" y="0"/>
+                </a:lnTo>
+                <a:close/>
+              </a:path>
+            </a:pathLst>
+          </a:custGeom>
+          <a:blipFill>
+            <a:blip r:embed="rId5"/>
+            <a:stretch>
+              <a:fillRect l="0" t="0" r="0" b="0"/>
+            </a:stretch>
+          </a:blipFill>
+        </p:spPr>
+      </p:sp>
+      <p:sp>
+        <p:nvSpPr>
+          <p:cNvPr name="Freeform 9" id="9"/>
+          <p:cNvSpPr/>
+          <p:nvPr/>
+        </p:nvSpPr>
+        <p:spPr>
+          <a:xfrm flipH="false" flipV="false" rot="0">
+            <a:off x="180975" y="2219325"/>
+            <a:ext cx="2295525" cy="3533775"/>
+          </a:xfrm>
+          <a:custGeom>
+            <a:avLst/>
+            <a:gdLst/>
+            <a:ahLst/>
+            <a:cxnLst/>
+            <a:rect r="r" b="b" t="t" l="l"/>
+            <a:pathLst>
+              <a:path h="3533775" w="2295525">
+                <a:moveTo>
+                  <a:pt x="0" y="0"/>
+                </a:moveTo>
+                <a:lnTo>
+                  <a:pt x="2295525" y="0"/>
+                </a:lnTo>
+                <a:lnTo>
+                  <a:pt x="2295525" y="3533775"/>
+                </a:lnTo>
+                <a:lnTo>
+                  <a:pt x="0" y="3533775"/>
                 </a:lnTo>
                 <a:lnTo>
                   <a:pt x="0" y="0"/>
@@ -3827,48 +3417,41 @@
           <a:blipFill>
             <a:blip r:embed="rId6"/>
             <a:stretch>
-              <a:fillRect/>
+              <a:fillRect l="0" t="0" r="0" b="0"/>
             </a:stretch>
           </a:blipFill>
         </p:spPr>
-        <p:txBody>
-          <a:bodyPr/>
-          <a:lstStyle/>
-          <a:p>
-            <a:endParaRPr lang="en-GB"/>
-          </a:p>
-        </p:txBody>
-      </p:sp>
-      <p:sp>
-        <p:nvSpPr>
-          <p:cNvPr id="9" name="Freeform 9"/>
+      </p:sp>
+      <p:sp>
+        <p:nvSpPr>
+          <p:cNvPr name="Freeform 10" id="10"/>
           <p:cNvSpPr/>
           <p:nvPr/>
         </p:nvSpPr>
         <p:spPr>
-          <a:xfrm>
-            <a:off x="180975" y="2219325"/>
-            <a:ext cx="2295525" cy="3533775"/>
+          <a:xfrm flipH="false" flipV="false" rot="0">
+            <a:off x="1133475" y="2038350"/>
+            <a:ext cx="581025" cy="561975"/>
           </a:xfrm>
           <a:custGeom>
             <a:avLst/>
             <a:gdLst/>
             <a:ahLst/>
             <a:cxnLst/>
-            <a:rect l="l" t="t" r="r" b="b"/>
+            <a:rect r="r" b="b" t="t" l="l"/>
             <a:pathLst>
-              <a:path w="2295525" h="3533775">
+              <a:path h="561975" w="581025">
                 <a:moveTo>
                   <a:pt x="0" y="0"/>
                 </a:moveTo>
                 <a:lnTo>
-                  <a:pt x="2295525" y="0"/>
-                </a:lnTo>
-                <a:lnTo>
-                  <a:pt x="2295525" y="3533775"/>
-                </a:lnTo>
-                <a:lnTo>
-                  <a:pt x="0" y="3533775"/>
+                  <a:pt x="581025" y="0"/>
+                </a:lnTo>
+                <a:lnTo>
+                  <a:pt x="581025" y="561975"/>
+                </a:lnTo>
+                <a:lnTo>
+                  <a:pt x="0" y="561975"/>
                 </a:lnTo>
                 <a:lnTo>
                   <a:pt x="0" y="0"/>
@@ -3880,48 +3463,41 @@
           <a:blipFill>
             <a:blip r:embed="rId7"/>
             <a:stretch>
-              <a:fillRect/>
+              <a:fillRect l="0" t="0" r="0" b="0"/>
             </a:stretch>
           </a:blipFill>
         </p:spPr>
-        <p:txBody>
-          <a:bodyPr/>
-          <a:lstStyle/>
-          <a:p>
-            <a:endParaRPr lang="en-GB"/>
-          </a:p>
-        </p:txBody>
-      </p:sp>
-      <p:sp>
-        <p:nvSpPr>
-          <p:cNvPr id="10" name="Freeform 10"/>
+      </p:sp>
+      <p:sp>
+        <p:nvSpPr>
+          <p:cNvPr name="Freeform 11" id="11"/>
           <p:cNvSpPr/>
           <p:nvPr/>
         </p:nvSpPr>
         <p:spPr>
-          <a:xfrm>
-            <a:off x="1133475" y="2038350"/>
-            <a:ext cx="581025" cy="561975"/>
+          <a:xfrm flipH="false" flipV="false" rot="0">
+            <a:off x="942975" y="2590800"/>
+            <a:ext cx="771525" cy="942975"/>
           </a:xfrm>
           <a:custGeom>
             <a:avLst/>
             <a:gdLst/>
             <a:ahLst/>
             <a:cxnLst/>
-            <a:rect l="l" t="t" r="r" b="b"/>
+            <a:rect r="r" b="b" t="t" l="l"/>
             <a:pathLst>
-              <a:path w="581025" h="561975">
+              <a:path h="942975" w="771525">
                 <a:moveTo>
                   <a:pt x="0" y="0"/>
                 </a:moveTo>
                 <a:lnTo>
-                  <a:pt x="581025" y="0"/>
-                </a:lnTo>
-                <a:lnTo>
-                  <a:pt x="581025" y="561975"/>
-                </a:lnTo>
-                <a:lnTo>
-                  <a:pt x="0" y="561975"/>
+                  <a:pt x="771525" y="0"/>
+                </a:lnTo>
+                <a:lnTo>
+                  <a:pt x="771525" y="942975"/>
+                </a:lnTo>
+                <a:lnTo>
+                  <a:pt x="0" y="942975"/>
                 </a:lnTo>
                 <a:lnTo>
                   <a:pt x="0" y="0"/>
@@ -3933,79 +3509,19 @@
           <a:blipFill>
             <a:blip r:embed="rId8"/>
             <a:stretch>
-              <a:fillRect/>
+              <a:fillRect l="0" t="0" r="0" b="0"/>
             </a:stretch>
           </a:blipFill>
         </p:spPr>
-        <p:txBody>
-          <a:bodyPr/>
-          <a:lstStyle/>
-          <a:p>
-            <a:endParaRPr lang="en-GB"/>
-          </a:p>
-        </p:txBody>
-      </p:sp>
-      <p:sp>
-        <p:nvSpPr>
-          <p:cNvPr id="11" name="Freeform 11"/>
-          <p:cNvSpPr/>
-          <p:nvPr/>
-        </p:nvSpPr>
-        <p:spPr>
-          <a:xfrm>
-            <a:off x="942975" y="2590800"/>
-            <a:ext cx="771525" cy="942975"/>
-          </a:xfrm>
-          <a:custGeom>
-            <a:avLst/>
-            <a:gdLst/>
-            <a:ahLst/>
-            <a:cxnLst/>
-            <a:rect l="l" t="t" r="r" b="b"/>
-            <a:pathLst>
-              <a:path w="771525" h="942975">
-                <a:moveTo>
-                  <a:pt x="0" y="0"/>
-                </a:moveTo>
-                <a:lnTo>
-                  <a:pt x="771525" y="0"/>
-                </a:lnTo>
-                <a:lnTo>
-                  <a:pt x="771525" y="942975"/>
-                </a:lnTo>
-                <a:lnTo>
-                  <a:pt x="0" y="942975"/>
-                </a:lnTo>
-                <a:lnTo>
-                  <a:pt x="0" y="0"/>
-                </a:lnTo>
-                <a:close/>
-              </a:path>
-            </a:pathLst>
-          </a:custGeom>
-          <a:blipFill>
-            <a:blip r:embed="rId9"/>
-            <a:stretch>
-              <a:fillRect/>
-            </a:stretch>
-          </a:blipFill>
-        </p:spPr>
-        <p:txBody>
-          <a:bodyPr/>
-          <a:lstStyle/>
-          <a:p>
-            <a:endParaRPr lang="en-GB"/>
-          </a:p>
-        </p:txBody>
-      </p:sp>
-      <p:sp>
-        <p:nvSpPr>
-          <p:cNvPr id="12" name="TextBox 12"/>
-          <p:cNvSpPr txBox="1"/>
-          <p:nvPr/>
-        </p:nvSpPr>
-        <p:spPr>
-          <a:xfrm>
+      </p:sp>
+      <p:sp>
+        <p:nvSpPr>
+          <p:cNvPr name="TextBox 12" id="12"/>
+          <p:cNvSpPr txBox="true"/>
+          <p:nvPr/>
+        </p:nvSpPr>
+        <p:spPr>
+          <a:xfrm rot="0">
             <a:off x="856907" y="3709309"/>
             <a:ext cx="1031786" cy="454529"/>
           </a:xfrm>
@@ -4014,7 +3530,7 @@
           </a:prstGeom>
         </p:spPr>
         <p:txBody>
-          <a:bodyPr lIns="0" tIns="0" rIns="0" bIns="0" rtlCol="0" anchor="t">
+          <a:bodyPr anchor="t" rtlCol="false" tIns="0" lIns="0" bIns="0" rIns="0">
             <a:spAutoFit/>
           </a:bodyPr>
           <a:lstStyle/>
@@ -4060,12 +3576,12 @@
       </p:sp>
       <p:sp>
         <p:nvSpPr>
-          <p:cNvPr id="13" name="Freeform 13"/>
+          <p:cNvPr name="Freeform 13" id="13"/>
           <p:cNvSpPr/>
           <p:nvPr/>
         </p:nvSpPr>
         <p:spPr>
-          <a:xfrm>
+          <a:xfrm flipH="false" flipV="false" rot="0">
             <a:off x="371475" y="4257675"/>
             <a:ext cx="1914525" cy="200025"/>
           </a:xfrm>
@@ -4074,9 +3590,9 @@
             <a:gdLst/>
             <a:ahLst/>
             <a:cxnLst/>
-            <a:rect l="l" t="t" r="r" b="b"/>
+            <a:rect r="r" b="b" t="t" l="l"/>
             <a:pathLst>
-              <a:path w="1914525" h="200025">
+              <a:path h="200025" w="1914525">
                 <a:moveTo>
                   <a:pt x="0" y="0"/>
                 </a:moveTo>
@@ -4097,28 +3613,21 @@
             </a:pathLst>
           </a:custGeom>
           <a:blipFill>
-            <a:blip r:embed="rId10"/>
+            <a:blip r:embed="rId9"/>
             <a:stretch>
-              <a:fillRect/>
+              <a:fillRect l="0" t="0" r="0" b="0"/>
             </a:stretch>
           </a:blipFill>
         </p:spPr>
-        <p:txBody>
-          <a:bodyPr/>
-          <a:lstStyle/>
-          <a:p>
-            <a:endParaRPr lang="en-GB"/>
-          </a:p>
-        </p:txBody>
-      </p:sp>
-      <p:sp>
-        <p:nvSpPr>
-          <p:cNvPr id="14" name="TextBox 14"/>
-          <p:cNvSpPr txBox="1"/>
-          <p:nvPr/>
-        </p:nvSpPr>
-        <p:spPr>
-          <a:xfrm>
+      </p:sp>
+      <p:sp>
+        <p:nvSpPr>
+          <p:cNvPr name="TextBox 14" id="14"/>
+          <p:cNvSpPr txBox="true"/>
+          <p:nvPr/>
+        </p:nvSpPr>
+        <p:spPr>
+          <a:xfrm rot="0">
             <a:off x="524637" y="4551455"/>
             <a:ext cx="1696326" cy="666750"/>
           </a:xfrm>
@@ -4127,7 +3636,7 @@
           </a:prstGeom>
         </p:spPr>
         <p:txBody>
-          <a:bodyPr lIns="0" tIns="0" rIns="0" bIns="0" rtlCol="0" anchor="t">
+          <a:bodyPr anchor="t" rtlCol="false" tIns="0" lIns="0" bIns="0" rIns="0">
             <a:spAutoFit/>
           </a:bodyPr>
           <a:lstStyle/>
@@ -4154,12 +3663,12 @@
       </p:sp>
       <p:sp>
         <p:nvSpPr>
-          <p:cNvPr id="15" name="Freeform 15"/>
+          <p:cNvPr name="Freeform 15" id="15"/>
           <p:cNvSpPr/>
           <p:nvPr/>
         </p:nvSpPr>
         <p:spPr>
-          <a:xfrm>
+          <a:xfrm flipH="false" flipV="false" rot="0">
             <a:off x="2657475" y="2219325"/>
             <a:ext cx="2286000" cy="3533775"/>
           </a:xfrm>
@@ -4168,9 +3677,9 @@
             <a:gdLst/>
             <a:ahLst/>
             <a:cxnLst/>
-            <a:rect l="l" t="t" r="r" b="b"/>
+            <a:rect r="r" b="b" t="t" l="l"/>
             <a:pathLst>
-              <a:path w="2286000" h="3533775">
+              <a:path h="3533775" w="2286000">
                 <a:moveTo>
                   <a:pt x="0" y="0"/>
                 </a:moveTo>
@@ -4182,6 +3691,52 @@
                 </a:lnTo>
                 <a:lnTo>
                   <a:pt x="0" y="3533775"/>
+                </a:lnTo>
+                <a:lnTo>
+                  <a:pt x="0" y="0"/>
+                </a:lnTo>
+                <a:close/>
+              </a:path>
+            </a:pathLst>
+          </a:custGeom>
+          <a:blipFill>
+            <a:blip r:embed="rId10"/>
+            <a:stretch>
+              <a:fillRect l="0" t="0" r="0" b="0"/>
+            </a:stretch>
+          </a:blipFill>
+        </p:spPr>
+      </p:sp>
+      <p:sp>
+        <p:nvSpPr>
+          <p:cNvPr name="Freeform 16" id="16"/>
+          <p:cNvSpPr/>
+          <p:nvPr/>
+        </p:nvSpPr>
+        <p:spPr>
+          <a:xfrm flipH="false" flipV="false" rot="0">
+            <a:off x="3419475" y="2038350"/>
+            <a:ext cx="581025" cy="561975"/>
+          </a:xfrm>
+          <a:custGeom>
+            <a:avLst/>
+            <a:gdLst/>
+            <a:ahLst/>
+            <a:cxnLst/>
+            <a:rect r="r" b="b" t="t" l="l"/>
+            <a:pathLst>
+              <a:path h="561975" w="581025">
+                <a:moveTo>
+                  <a:pt x="0" y="0"/>
+                </a:moveTo>
+                <a:lnTo>
+                  <a:pt x="581025" y="0"/>
+                </a:lnTo>
+                <a:lnTo>
+                  <a:pt x="581025" y="561975"/>
+                </a:lnTo>
+                <a:lnTo>
+                  <a:pt x="0" y="561975"/>
                 </a:lnTo>
                 <a:lnTo>
                   <a:pt x="0" y="0"/>
@@ -4193,48 +3748,41 @@
           <a:blipFill>
             <a:blip r:embed="rId11"/>
             <a:stretch>
-              <a:fillRect/>
+              <a:fillRect l="0" t="0" r="0" b="0"/>
             </a:stretch>
           </a:blipFill>
         </p:spPr>
-        <p:txBody>
-          <a:bodyPr/>
-          <a:lstStyle/>
-          <a:p>
-            <a:endParaRPr lang="en-GB"/>
-          </a:p>
-        </p:txBody>
-      </p:sp>
-      <p:sp>
-        <p:nvSpPr>
-          <p:cNvPr id="16" name="Freeform 16"/>
+      </p:sp>
+      <p:sp>
+        <p:nvSpPr>
+          <p:cNvPr name="Freeform 17" id="17"/>
           <p:cNvSpPr/>
           <p:nvPr/>
         </p:nvSpPr>
         <p:spPr>
-          <a:xfrm>
-            <a:off x="3419475" y="2038350"/>
-            <a:ext cx="581025" cy="561975"/>
+          <a:xfrm flipH="false" flipV="false" rot="0">
+            <a:off x="3228975" y="2590800"/>
+            <a:ext cx="962025" cy="942975"/>
           </a:xfrm>
           <a:custGeom>
             <a:avLst/>
             <a:gdLst/>
             <a:ahLst/>
             <a:cxnLst/>
-            <a:rect l="l" t="t" r="r" b="b"/>
+            <a:rect r="r" b="b" t="t" l="l"/>
             <a:pathLst>
-              <a:path w="581025" h="561975">
+              <a:path h="942975" w="962025">
                 <a:moveTo>
                   <a:pt x="0" y="0"/>
                 </a:moveTo>
                 <a:lnTo>
-                  <a:pt x="581025" y="0"/>
-                </a:lnTo>
-                <a:lnTo>
-                  <a:pt x="581025" y="561975"/>
-                </a:lnTo>
-                <a:lnTo>
-                  <a:pt x="0" y="561975"/>
+                  <a:pt x="962025" y="0"/>
+                </a:lnTo>
+                <a:lnTo>
+                  <a:pt x="962025" y="942975"/>
+                </a:lnTo>
+                <a:lnTo>
+                  <a:pt x="0" y="942975"/>
                 </a:lnTo>
                 <a:lnTo>
                   <a:pt x="0" y="0"/>
@@ -4246,79 +3794,19 @@
           <a:blipFill>
             <a:blip r:embed="rId12"/>
             <a:stretch>
-              <a:fillRect/>
+              <a:fillRect l="0" t="0" r="0" b="0"/>
             </a:stretch>
           </a:blipFill>
         </p:spPr>
-        <p:txBody>
-          <a:bodyPr/>
-          <a:lstStyle/>
-          <a:p>
-            <a:endParaRPr lang="en-GB"/>
-          </a:p>
-        </p:txBody>
-      </p:sp>
-      <p:sp>
-        <p:nvSpPr>
-          <p:cNvPr id="17" name="Freeform 17"/>
-          <p:cNvSpPr/>
-          <p:nvPr/>
-        </p:nvSpPr>
-        <p:spPr>
-          <a:xfrm>
-            <a:off x="3228975" y="2590800"/>
-            <a:ext cx="962025" cy="942975"/>
-          </a:xfrm>
-          <a:custGeom>
-            <a:avLst/>
-            <a:gdLst/>
-            <a:ahLst/>
-            <a:cxnLst/>
-            <a:rect l="l" t="t" r="r" b="b"/>
-            <a:pathLst>
-              <a:path w="962025" h="942975">
-                <a:moveTo>
-                  <a:pt x="0" y="0"/>
-                </a:moveTo>
-                <a:lnTo>
-                  <a:pt x="962025" y="0"/>
-                </a:lnTo>
-                <a:lnTo>
-                  <a:pt x="962025" y="942975"/>
-                </a:lnTo>
-                <a:lnTo>
-                  <a:pt x="0" y="942975"/>
-                </a:lnTo>
-                <a:lnTo>
-                  <a:pt x="0" y="0"/>
-                </a:lnTo>
-                <a:close/>
-              </a:path>
-            </a:pathLst>
-          </a:custGeom>
-          <a:blipFill>
-            <a:blip r:embed="rId13"/>
-            <a:stretch>
-              <a:fillRect/>
-            </a:stretch>
-          </a:blipFill>
-        </p:spPr>
-        <p:txBody>
-          <a:bodyPr/>
-          <a:lstStyle/>
-          <a:p>
-            <a:endParaRPr lang="en-GB"/>
-          </a:p>
-        </p:txBody>
-      </p:sp>
-      <p:sp>
-        <p:nvSpPr>
-          <p:cNvPr id="18" name="TextBox 18"/>
-          <p:cNvSpPr txBox="1"/>
-          <p:nvPr/>
-        </p:nvSpPr>
-        <p:spPr>
-          <a:xfrm>
+      </p:sp>
+      <p:sp>
+        <p:nvSpPr>
+          <p:cNvPr name="TextBox 18" id="18"/>
+          <p:cNvSpPr txBox="true"/>
+          <p:nvPr/>
+        </p:nvSpPr>
+        <p:spPr>
+          <a:xfrm rot="0">
             <a:off x="2868016" y="3719734"/>
             <a:ext cx="1818742" cy="433678"/>
           </a:xfrm>
@@ -4327,7 +3815,7 @@
           </a:prstGeom>
         </p:spPr>
         <p:txBody>
-          <a:bodyPr lIns="0" tIns="0" rIns="0" bIns="0" rtlCol="0" anchor="t">
+          <a:bodyPr anchor="t" rtlCol="false" tIns="0" lIns="0" bIns="0" rIns="0">
             <a:spAutoFit/>
           </a:bodyPr>
           <a:lstStyle/>
@@ -4354,12 +3842,12 @@
       </p:sp>
       <p:sp>
         <p:nvSpPr>
-          <p:cNvPr id="19" name="Freeform 19"/>
+          <p:cNvPr name="Freeform 19" id="19"/>
           <p:cNvSpPr/>
           <p:nvPr/>
         </p:nvSpPr>
         <p:spPr>
-          <a:xfrm>
+          <a:xfrm flipH="false" flipV="false" rot="0">
             <a:off x="2847975" y="4257675"/>
             <a:ext cx="1905000" cy="200025"/>
           </a:xfrm>
@@ -4368,9 +3856,9 @@
             <a:gdLst/>
             <a:ahLst/>
             <a:cxnLst/>
-            <a:rect l="l" t="t" r="r" b="b"/>
+            <a:rect r="r" b="b" t="t" l="l"/>
             <a:pathLst>
-              <a:path w="1905000" h="200025">
+              <a:path h="200025" w="1905000">
                 <a:moveTo>
                   <a:pt x="0" y="0"/>
                 </a:moveTo>
@@ -4391,28 +3879,21 @@
             </a:pathLst>
           </a:custGeom>
           <a:blipFill>
-            <a:blip r:embed="rId14"/>
+            <a:blip r:embed="rId13"/>
             <a:stretch>
-              <a:fillRect/>
+              <a:fillRect l="0" t="0" r="0" b="0"/>
             </a:stretch>
           </a:blipFill>
         </p:spPr>
-        <p:txBody>
-          <a:bodyPr/>
-          <a:lstStyle/>
-          <a:p>
-            <a:endParaRPr lang="en-GB"/>
-          </a:p>
-        </p:txBody>
-      </p:sp>
-      <p:sp>
-        <p:nvSpPr>
-          <p:cNvPr id="20" name="TextBox 20"/>
-          <p:cNvSpPr txBox="1"/>
-          <p:nvPr/>
-        </p:nvSpPr>
-        <p:spPr>
-          <a:xfrm>
+      </p:sp>
+      <p:sp>
+        <p:nvSpPr>
+          <p:cNvPr name="TextBox 20" id="20"/>
+          <p:cNvSpPr txBox="true"/>
+          <p:nvPr/>
+        </p:nvSpPr>
+        <p:spPr>
+          <a:xfrm rot="0">
             <a:off x="2972943" y="4551455"/>
             <a:ext cx="1626375" cy="666750"/>
           </a:xfrm>
@@ -4421,7 +3902,7 @@
           </a:prstGeom>
         </p:spPr>
         <p:txBody>
-          <a:bodyPr lIns="0" tIns="0" rIns="0" bIns="0" rtlCol="0" anchor="t">
+          <a:bodyPr anchor="t" rtlCol="false" tIns="0" lIns="0" bIns="0" rIns="0">
             <a:spAutoFit/>
           </a:bodyPr>
           <a:lstStyle/>
@@ -4448,12 +3929,12 @@
       </p:sp>
       <p:sp>
         <p:nvSpPr>
-          <p:cNvPr id="21" name="Freeform 21"/>
+          <p:cNvPr name="Freeform 21" id="21"/>
           <p:cNvSpPr/>
           <p:nvPr/>
         </p:nvSpPr>
         <p:spPr>
-          <a:xfrm>
+          <a:xfrm flipH="false" flipV="false" rot="0">
             <a:off x="5124450" y="2219325"/>
             <a:ext cx="2105025" cy="3533775"/>
           </a:xfrm>
@@ -4462,9 +3943,9 @@
             <a:gdLst/>
             <a:ahLst/>
             <a:cxnLst/>
-            <a:rect l="l" t="t" r="r" b="b"/>
+            <a:rect r="r" b="b" t="t" l="l"/>
             <a:pathLst>
-              <a:path w="2105025" h="3533775">
+              <a:path h="3533775" w="2105025">
                 <a:moveTo>
                   <a:pt x="0" y="0"/>
                 </a:moveTo>
@@ -4476,6 +3957,52 @@
                 </a:lnTo>
                 <a:lnTo>
                   <a:pt x="0" y="3533775"/>
+                </a:lnTo>
+                <a:lnTo>
+                  <a:pt x="0" y="0"/>
+                </a:lnTo>
+                <a:close/>
+              </a:path>
+            </a:pathLst>
+          </a:custGeom>
+          <a:blipFill>
+            <a:blip r:embed="rId14"/>
+            <a:stretch>
+              <a:fillRect l="0" t="0" r="0" b="0"/>
+            </a:stretch>
+          </a:blipFill>
+        </p:spPr>
+      </p:sp>
+      <p:sp>
+        <p:nvSpPr>
+          <p:cNvPr name="Freeform 22" id="22"/>
+          <p:cNvSpPr/>
+          <p:nvPr/>
+        </p:nvSpPr>
+        <p:spPr>
+          <a:xfrm flipH="false" flipV="false" rot="0">
+            <a:off x="5886450" y="2038350"/>
+            <a:ext cx="581025" cy="561975"/>
+          </a:xfrm>
+          <a:custGeom>
+            <a:avLst/>
+            <a:gdLst/>
+            <a:ahLst/>
+            <a:cxnLst/>
+            <a:rect r="r" b="b" t="t" l="l"/>
+            <a:pathLst>
+              <a:path h="561975" w="581025">
+                <a:moveTo>
+                  <a:pt x="0" y="0"/>
+                </a:moveTo>
+                <a:lnTo>
+                  <a:pt x="581025" y="0"/>
+                </a:lnTo>
+                <a:lnTo>
+                  <a:pt x="581025" y="561975"/>
+                </a:lnTo>
+                <a:lnTo>
+                  <a:pt x="0" y="561975"/>
                 </a:lnTo>
                 <a:lnTo>
                   <a:pt x="0" y="0"/>
@@ -4487,48 +4014,41 @@
           <a:blipFill>
             <a:blip r:embed="rId15"/>
             <a:stretch>
-              <a:fillRect/>
+              <a:fillRect l="0" t="0" r="0" b="0"/>
             </a:stretch>
           </a:blipFill>
         </p:spPr>
-        <p:txBody>
-          <a:bodyPr/>
-          <a:lstStyle/>
-          <a:p>
-            <a:endParaRPr lang="en-GB"/>
-          </a:p>
-        </p:txBody>
-      </p:sp>
-      <p:sp>
-        <p:nvSpPr>
-          <p:cNvPr id="22" name="Freeform 22"/>
+      </p:sp>
+      <p:sp>
+        <p:nvSpPr>
+          <p:cNvPr name="Freeform 23" id="23"/>
           <p:cNvSpPr/>
           <p:nvPr/>
         </p:nvSpPr>
         <p:spPr>
-          <a:xfrm>
-            <a:off x="5886450" y="2038350"/>
-            <a:ext cx="581025" cy="561975"/>
+          <a:xfrm flipH="false" flipV="false" rot="0">
+            <a:off x="5695950" y="2590800"/>
+            <a:ext cx="962025" cy="942975"/>
           </a:xfrm>
           <a:custGeom>
             <a:avLst/>
             <a:gdLst/>
             <a:ahLst/>
             <a:cxnLst/>
-            <a:rect l="l" t="t" r="r" b="b"/>
+            <a:rect r="r" b="b" t="t" l="l"/>
             <a:pathLst>
-              <a:path w="581025" h="561975">
+              <a:path h="942975" w="962025">
                 <a:moveTo>
                   <a:pt x="0" y="0"/>
                 </a:moveTo>
                 <a:lnTo>
-                  <a:pt x="581025" y="0"/>
-                </a:lnTo>
-                <a:lnTo>
-                  <a:pt x="581025" y="561975"/>
-                </a:lnTo>
-                <a:lnTo>
-                  <a:pt x="0" y="561975"/>
+                  <a:pt x="962025" y="0"/>
+                </a:lnTo>
+                <a:lnTo>
+                  <a:pt x="962025" y="942975"/>
+                </a:lnTo>
+                <a:lnTo>
+                  <a:pt x="0" y="942975"/>
                 </a:lnTo>
                 <a:lnTo>
                   <a:pt x="0" y="0"/>
@@ -4540,79 +4060,19 @@
           <a:blipFill>
             <a:blip r:embed="rId16"/>
             <a:stretch>
-              <a:fillRect/>
+              <a:fillRect l="0" t="0" r="0" b="0"/>
             </a:stretch>
           </a:blipFill>
         </p:spPr>
-        <p:txBody>
-          <a:bodyPr/>
-          <a:lstStyle/>
-          <a:p>
-            <a:endParaRPr lang="en-GB"/>
-          </a:p>
-        </p:txBody>
-      </p:sp>
-      <p:sp>
-        <p:nvSpPr>
-          <p:cNvPr id="23" name="Freeform 23"/>
-          <p:cNvSpPr/>
-          <p:nvPr/>
-        </p:nvSpPr>
-        <p:spPr>
-          <a:xfrm>
-            <a:off x="5695950" y="2590800"/>
-            <a:ext cx="962025" cy="942975"/>
-          </a:xfrm>
-          <a:custGeom>
-            <a:avLst/>
-            <a:gdLst/>
-            <a:ahLst/>
-            <a:cxnLst/>
-            <a:rect l="l" t="t" r="r" b="b"/>
-            <a:pathLst>
-              <a:path w="962025" h="942975">
-                <a:moveTo>
-                  <a:pt x="0" y="0"/>
-                </a:moveTo>
-                <a:lnTo>
-                  <a:pt x="962025" y="0"/>
-                </a:lnTo>
-                <a:lnTo>
-                  <a:pt x="962025" y="942975"/>
-                </a:lnTo>
-                <a:lnTo>
-                  <a:pt x="0" y="942975"/>
-                </a:lnTo>
-                <a:lnTo>
-                  <a:pt x="0" y="0"/>
-                </a:lnTo>
-                <a:close/>
-              </a:path>
-            </a:pathLst>
-          </a:custGeom>
-          <a:blipFill>
-            <a:blip r:embed="rId17"/>
-            <a:stretch>
-              <a:fillRect/>
-            </a:stretch>
-          </a:blipFill>
-        </p:spPr>
-        <p:txBody>
-          <a:bodyPr/>
-          <a:lstStyle/>
-          <a:p>
-            <a:endParaRPr lang="en-GB"/>
-          </a:p>
-        </p:txBody>
-      </p:sp>
-      <p:sp>
-        <p:nvSpPr>
-          <p:cNvPr id="24" name="TextBox 24"/>
-          <p:cNvSpPr txBox="1"/>
-          <p:nvPr/>
-        </p:nvSpPr>
-        <p:spPr>
-          <a:xfrm>
+      </p:sp>
+      <p:sp>
+        <p:nvSpPr>
+          <p:cNvPr name="TextBox 24" id="24"/>
+          <p:cNvSpPr txBox="true"/>
+          <p:nvPr/>
+        </p:nvSpPr>
+        <p:spPr>
+          <a:xfrm rot="0">
             <a:off x="5403761" y="3709309"/>
             <a:ext cx="1573911" cy="454529"/>
           </a:xfrm>
@@ -4621,7 +4081,7 @@
           </a:prstGeom>
         </p:spPr>
         <p:txBody>
-          <a:bodyPr lIns="0" tIns="0" rIns="0" bIns="0" rtlCol="0" anchor="t">
+          <a:bodyPr anchor="t" rtlCol="false" tIns="0" lIns="0" bIns="0" rIns="0">
             <a:spAutoFit/>
           </a:bodyPr>
           <a:lstStyle/>
@@ -4648,12 +4108,12 @@
       </p:sp>
       <p:sp>
         <p:nvSpPr>
-          <p:cNvPr id="25" name="Freeform 25"/>
+          <p:cNvPr name="Freeform 25" id="25"/>
           <p:cNvSpPr/>
           <p:nvPr/>
         </p:nvSpPr>
         <p:spPr>
-          <a:xfrm>
+          <a:xfrm flipH="false" flipV="false" rot="0">
             <a:off x="5314950" y="4257675"/>
             <a:ext cx="1724025" cy="200025"/>
           </a:xfrm>
@@ -4662,9 +4122,9 @@
             <a:gdLst/>
             <a:ahLst/>
             <a:cxnLst/>
-            <a:rect l="l" t="t" r="r" b="b"/>
+            <a:rect r="r" b="b" t="t" l="l"/>
             <a:pathLst>
-              <a:path w="1724025" h="200025">
+              <a:path h="200025" w="1724025">
                 <a:moveTo>
                   <a:pt x="0" y="0"/>
                 </a:moveTo>
@@ -4685,28 +4145,21 @@
             </a:pathLst>
           </a:custGeom>
           <a:blipFill>
-            <a:blip r:embed="rId18"/>
+            <a:blip r:embed="rId17"/>
             <a:stretch>
-              <a:fillRect/>
+              <a:fillRect l="0" t="0" r="0" b="0"/>
             </a:stretch>
           </a:blipFill>
         </p:spPr>
-        <p:txBody>
-          <a:bodyPr/>
-          <a:lstStyle/>
-          <a:p>
-            <a:endParaRPr lang="en-GB"/>
-          </a:p>
-        </p:txBody>
-      </p:sp>
-      <p:sp>
-        <p:nvSpPr>
-          <p:cNvPr id="26" name="TextBox 26"/>
-          <p:cNvSpPr txBox="1"/>
-          <p:nvPr/>
-        </p:nvSpPr>
-        <p:spPr>
-          <a:xfrm>
+      </p:sp>
+      <p:sp>
+        <p:nvSpPr>
+          <p:cNvPr name="TextBox 26" id="26"/>
+          <p:cNvSpPr txBox="true"/>
+          <p:nvPr/>
+        </p:nvSpPr>
+        <p:spPr>
+          <a:xfrm rot="0">
             <a:off x="5473713" y="4568442"/>
             <a:ext cx="1416520" cy="885825"/>
           </a:xfrm>
@@ -4715,7 +4168,7 @@
           </a:prstGeom>
         </p:spPr>
         <p:txBody>
-          <a:bodyPr lIns="0" tIns="0" rIns="0" bIns="0" rtlCol="0" anchor="t">
+          <a:bodyPr anchor="t" rtlCol="false" tIns="0" lIns="0" bIns="0" rIns="0">
             <a:spAutoFit/>
           </a:bodyPr>
           <a:lstStyle/>
@@ -4742,12 +4195,12 @@
       </p:sp>
       <p:sp>
         <p:nvSpPr>
-          <p:cNvPr id="27" name="Freeform 27"/>
+          <p:cNvPr name="Freeform 27" id="27"/>
           <p:cNvSpPr/>
           <p:nvPr/>
         </p:nvSpPr>
         <p:spPr>
-          <a:xfrm>
+          <a:xfrm flipH="false" flipV="false" rot="0">
             <a:off x="7410450" y="2219325"/>
             <a:ext cx="2095500" cy="3533775"/>
           </a:xfrm>
@@ -4756,9 +4209,9 @@
             <a:gdLst/>
             <a:ahLst/>
             <a:cxnLst/>
-            <a:rect l="l" t="t" r="r" b="b"/>
+            <a:rect r="r" b="b" t="t" l="l"/>
             <a:pathLst>
-              <a:path w="2095500" h="3533775">
+              <a:path h="3533775" w="2095500">
                 <a:moveTo>
                   <a:pt x="0" y="0"/>
                 </a:moveTo>
@@ -4770,6 +4223,52 @@
                 </a:lnTo>
                 <a:lnTo>
                   <a:pt x="0" y="3533775"/>
+                </a:lnTo>
+                <a:lnTo>
+                  <a:pt x="0" y="0"/>
+                </a:lnTo>
+                <a:close/>
+              </a:path>
+            </a:pathLst>
+          </a:custGeom>
+          <a:blipFill>
+            <a:blip r:embed="rId18"/>
+            <a:stretch>
+              <a:fillRect l="0" t="0" r="0" b="0"/>
+            </a:stretch>
+          </a:blipFill>
+        </p:spPr>
+      </p:sp>
+      <p:sp>
+        <p:nvSpPr>
+          <p:cNvPr name="Freeform 28" id="28"/>
+          <p:cNvSpPr/>
+          <p:nvPr/>
+        </p:nvSpPr>
+        <p:spPr>
+          <a:xfrm flipH="false" flipV="false" rot="0">
+            <a:off x="8172450" y="2038350"/>
+            <a:ext cx="571500" cy="561975"/>
+          </a:xfrm>
+          <a:custGeom>
+            <a:avLst/>
+            <a:gdLst/>
+            <a:ahLst/>
+            <a:cxnLst/>
+            <a:rect r="r" b="b" t="t" l="l"/>
+            <a:pathLst>
+              <a:path h="561975" w="571500">
+                <a:moveTo>
+                  <a:pt x="0" y="0"/>
+                </a:moveTo>
+                <a:lnTo>
+                  <a:pt x="571500" y="0"/>
+                </a:lnTo>
+                <a:lnTo>
+                  <a:pt x="571500" y="561975"/>
+                </a:lnTo>
+                <a:lnTo>
+                  <a:pt x="0" y="561975"/>
                 </a:lnTo>
                 <a:lnTo>
                   <a:pt x="0" y="0"/>
@@ -4781,48 +4280,41 @@
           <a:blipFill>
             <a:blip r:embed="rId19"/>
             <a:stretch>
-              <a:fillRect/>
+              <a:fillRect l="0" t="0" r="0" b="0"/>
             </a:stretch>
           </a:blipFill>
         </p:spPr>
-        <p:txBody>
-          <a:bodyPr/>
-          <a:lstStyle/>
-          <a:p>
-            <a:endParaRPr lang="en-GB"/>
-          </a:p>
-        </p:txBody>
-      </p:sp>
-      <p:sp>
-        <p:nvSpPr>
-          <p:cNvPr id="28" name="Freeform 28"/>
+      </p:sp>
+      <p:sp>
+        <p:nvSpPr>
+          <p:cNvPr name="Freeform 29" id="29"/>
           <p:cNvSpPr/>
           <p:nvPr/>
         </p:nvSpPr>
         <p:spPr>
-          <a:xfrm>
-            <a:off x="8172450" y="2038350"/>
-            <a:ext cx="571500" cy="561975"/>
+          <a:xfrm flipH="false" flipV="false" rot="0">
+            <a:off x="7981950" y="2590800"/>
+            <a:ext cx="952500" cy="942975"/>
           </a:xfrm>
           <a:custGeom>
             <a:avLst/>
             <a:gdLst/>
             <a:ahLst/>
             <a:cxnLst/>
-            <a:rect l="l" t="t" r="r" b="b"/>
+            <a:rect r="r" b="b" t="t" l="l"/>
             <a:pathLst>
-              <a:path w="571500" h="561975">
+              <a:path h="942975" w="952500">
                 <a:moveTo>
                   <a:pt x="0" y="0"/>
                 </a:moveTo>
                 <a:lnTo>
-                  <a:pt x="571500" y="0"/>
-                </a:lnTo>
-                <a:lnTo>
-                  <a:pt x="571500" y="561975"/>
-                </a:lnTo>
-                <a:lnTo>
-                  <a:pt x="0" y="561975"/>
+                  <a:pt x="952500" y="0"/>
+                </a:lnTo>
+                <a:lnTo>
+                  <a:pt x="952500" y="942975"/>
+                </a:lnTo>
+                <a:lnTo>
+                  <a:pt x="0" y="942975"/>
                 </a:lnTo>
                 <a:lnTo>
                   <a:pt x="0" y="0"/>
@@ -4834,79 +4326,19 @@
           <a:blipFill>
             <a:blip r:embed="rId20"/>
             <a:stretch>
-              <a:fillRect/>
+              <a:fillRect l="0" t="0" r="0" b="0"/>
             </a:stretch>
           </a:blipFill>
         </p:spPr>
-        <p:txBody>
-          <a:bodyPr/>
-          <a:lstStyle/>
-          <a:p>
-            <a:endParaRPr lang="en-GB"/>
-          </a:p>
-        </p:txBody>
-      </p:sp>
-      <p:sp>
-        <p:nvSpPr>
-          <p:cNvPr id="29" name="Freeform 29"/>
-          <p:cNvSpPr/>
-          <p:nvPr/>
-        </p:nvSpPr>
-        <p:spPr>
-          <a:xfrm>
-            <a:off x="7981950" y="2590800"/>
-            <a:ext cx="952500" cy="942975"/>
-          </a:xfrm>
-          <a:custGeom>
-            <a:avLst/>
-            <a:gdLst/>
-            <a:ahLst/>
-            <a:cxnLst/>
-            <a:rect l="l" t="t" r="r" b="b"/>
-            <a:pathLst>
-              <a:path w="952500" h="942975">
-                <a:moveTo>
-                  <a:pt x="0" y="0"/>
-                </a:moveTo>
-                <a:lnTo>
-                  <a:pt x="952500" y="0"/>
-                </a:lnTo>
-                <a:lnTo>
-                  <a:pt x="952500" y="942975"/>
-                </a:lnTo>
-                <a:lnTo>
-                  <a:pt x="0" y="942975"/>
-                </a:lnTo>
-                <a:lnTo>
-                  <a:pt x="0" y="0"/>
-                </a:lnTo>
-                <a:close/>
-              </a:path>
-            </a:pathLst>
-          </a:custGeom>
-          <a:blipFill>
-            <a:blip r:embed="rId21"/>
-            <a:stretch>
-              <a:fillRect/>
-            </a:stretch>
-          </a:blipFill>
-        </p:spPr>
-        <p:txBody>
-          <a:bodyPr/>
-          <a:lstStyle/>
-          <a:p>
-            <a:endParaRPr lang="en-GB"/>
-          </a:p>
-        </p:txBody>
-      </p:sp>
-      <p:sp>
-        <p:nvSpPr>
-          <p:cNvPr id="30" name="TextBox 30"/>
-          <p:cNvSpPr txBox="1"/>
-          <p:nvPr/>
-        </p:nvSpPr>
-        <p:spPr>
-          <a:xfrm>
+      </p:sp>
+      <p:sp>
+        <p:nvSpPr>
+          <p:cNvPr name="TextBox 30" id="30"/>
+          <p:cNvSpPr txBox="true"/>
+          <p:nvPr/>
+        </p:nvSpPr>
+        <p:spPr>
+          <a:xfrm rot="0">
             <a:off x="7852067" y="3709309"/>
             <a:ext cx="1171689" cy="454529"/>
           </a:xfrm>
@@ -4915,7 +4347,7 @@
           </a:prstGeom>
         </p:spPr>
         <p:txBody>
-          <a:bodyPr lIns="0" tIns="0" rIns="0" bIns="0" rtlCol="0" anchor="t">
+          <a:bodyPr anchor="t" rtlCol="false" tIns="0" lIns="0" bIns="0" rIns="0">
             <a:spAutoFit/>
           </a:bodyPr>
           <a:lstStyle/>
@@ -4942,12 +4374,12 @@
       </p:sp>
       <p:sp>
         <p:nvSpPr>
-          <p:cNvPr id="31" name="Freeform 31"/>
+          <p:cNvPr name="Freeform 31" id="31"/>
           <p:cNvSpPr/>
           <p:nvPr/>
         </p:nvSpPr>
         <p:spPr>
-          <a:xfrm>
+          <a:xfrm flipH="false" flipV="false" rot="0">
             <a:off x="7600950" y="4257675"/>
             <a:ext cx="1714500" cy="200025"/>
           </a:xfrm>
@@ -4956,9 +4388,9 @@
             <a:gdLst/>
             <a:ahLst/>
             <a:cxnLst/>
-            <a:rect l="l" t="t" r="r" b="b"/>
+            <a:rect r="r" b="b" t="t" l="l"/>
             <a:pathLst>
-              <a:path w="1714500" h="200025">
+              <a:path h="200025" w="1714500">
                 <a:moveTo>
                   <a:pt x="0" y="0"/>
                 </a:moveTo>
@@ -4979,28 +4411,21 @@
             </a:pathLst>
           </a:custGeom>
           <a:blipFill>
-            <a:blip r:embed="rId22"/>
+            <a:blip r:embed="rId21"/>
             <a:stretch>
-              <a:fillRect/>
+              <a:fillRect l="0" t="0" r="0" b="0"/>
             </a:stretch>
           </a:blipFill>
         </p:spPr>
-        <p:txBody>
-          <a:bodyPr/>
-          <a:lstStyle/>
-          <a:p>
-            <a:endParaRPr lang="en-GB"/>
-          </a:p>
-        </p:txBody>
-      </p:sp>
-      <p:sp>
-        <p:nvSpPr>
-          <p:cNvPr id="32" name="TextBox 32"/>
-          <p:cNvSpPr txBox="1"/>
-          <p:nvPr/>
-        </p:nvSpPr>
-        <p:spPr>
-          <a:xfrm>
+      </p:sp>
+      <p:sp>
+        <p:nvSpPr>
+          <p:cNvPr name="TextBox 32" id="32"/>
+          <p:cNvSpPr txBox="true"/>
+          <p:nvPr/>
+        </p:nvSpPr>
+        <p:spPr>
+          <a:xfrm rot="0">
             <a:off x="7659700" y="4587492"/>
             <a:ext cx="1573911" cy="847725"/>
           </a:xfrm>
@@ -5009,7 +4434,7 @@
           </a:prstGeom>
         </p:spPr>
         <p:txBody>
-          <a:bodyPr lIns="0" tIns="0" rIns="0" bIns="0" rtlCol="0" anchor="t">
+          <a:bodyPr anchor="t" rtlCol="false" tIns="0" lIns="0" bIns="0" rIns="0">
             <a:spAutoFit/>
           </a:bodyPr>
           <a:lstStyle/>
@@ -5036,12 +4461,12 @@
       </p:sp>
       <p:sp>
         <p:nvSpPr>
-          <p:cNvPr id="33" name="Freeform 33"/>
+          <p:cNvPr name="Freeform 33" id="33"/>
           <p:cNvSpPr/>
           <p:nvPr/>
         </p:nvSpPr>
         <p:spPr>
-          <a:xfrm>
+          <a:xfrm flipH="false" flipV="false" rot="0">
             <a:off x="9686925" y="2219325"/>
             <a:ext cx="2105025" cy="3533775"/>
           </a:xfrm>
@@ -5050,9 +4475,9 @@
             <a:gdLst/>
             <a:ahLst/>
             <a:cxnLst/>
-            <a:rect l="l" t="t" r="r" b="b"/>
+            <a:rect r="r" b="b" t="t" l="l"/>
             <a:pathLst>
-              <a:path w="2105025" h="3533775">
+              <a:path h="3533775" w="2105025">
                 <a:moveTo>
                   <a:pt x="0" y="0"/>
                 </a:moveTo>
@@ -5064,6 +4489,52 @@
                 </a:lnTo>
                 <a:lnTo>
                   <a:pt x="0" y="3533775"/>
+                </a:lnTo>
+                <a:lnTo>
+                  <a:pt x="0" y="0"/>
+                </a:lnTo>
+                <a:close/>
+              </a:path>
+            </a:pathLst>
+          </a:custGeom>
+          <a:blipFill>
+            <a:blip r:embed="rId22"/>
+            <a:stretch>
+              <a:fillRect l="0" t="0" r="0" b="0"/>
+            </a:stretch>
+          </a:blipFill>
+        </p:spPr>
+      </p:sp>
+      <p:sp>
+        <p:nvSpPr>
+          <p:cNvPr name="Freeform 34" id="34"/>
+          <p:cNvSpPr/>
+          <p:nvPr/>
+        </p:nvSpPr>
+        <p:spPr>
+          <a:xfrm flipH="false" flipV="false" rot="0">
+            <a:off x="10448925" y="2038350"/>
+            <a:ext cx="581025" cy="561975"/>
+          </a:xfrm>
+          <a:custGeom>
+            <a:avLst/>
+            <a:gdLst/>
+            <a:ahLst/>
+            <a:cxnLst/>
+            <a:rect r="r" b="b" t="t" l="l"/>
+            <a:pathLst>
+              <a:path h="561975" w="581025">
+                <a:moveTo>
+                  <a:pt x="0" y="0"/>
+                </a:moveTo>
+                <a:lnTo>
+                  <a:pt x="581025" y="0"/>
+                </a:lnTo>
+                <a:lnTo>
+                  <a:pt x="581025" y="561975"/>
+                </a:lnTo>
+                <a:lnTo>
+                  <a:pt x="0" y="561975"/>
                 </a:lnTo>
                 <a:lnTo>
                   <a:pt x="0" y="0"/>
@@ -5075,48 +4546,41 @@
           <a:blipFill>
             <a:blip r:embed="rId23"/>
             <a:stretch>
-              <a:fillRect/>
+              <a:fillRect l="0" t="0" r="0" b="0"/>
             </a:stretch>
           </a:blipFill>
         </p:spPr>
-        <p:txBody>
-          <a:bodyPr/>
-          <a:lstStyle/>
-          <a:p>
-            <a:endParaRPr lang="en-GB"/>
-          </a:p>
-        </p:txBody>
-      </p:sp>
-      <p:sp>
-        <p:nvSpPr>
-          <p:cNvPr id="34" name="Freeform 34"/>
+      </p:sp>
+      <p:sp>
+        <p:nvSpPr>
+          <p:cNvPr name="Freeform 35" id="35"/>
           <p:cNvSpPr/>
           <p:nvPr/>
         </p:nvSpPr>
         <p:spPr>
-          <a:xfrm>
-            <a:off x="10448925" y="2038350"/>
-            <a:ext cx="581025" cy="561975"/>
+          <a:xfrm flipH="false" flipV="false" rot="0">
+            <a:off x="10258425" y="2590800"/>
+            <a:ext cx="962025" cy="942975"/>
           </a:xfrm>
           <a:custGeom>
             <a:avLst/>
             <a:gdLst/>
             <a:ahLst/>
             <a:cxnLst/>
-            <a:rect l="l" t="t" r="r" b="b"/>
+            <a:rect r="r" b="b" t="t" l="l"/>
             <a:pathLst>
-              <a:path w="581025" h="561975">
+              <a:path h="942975" w="962025">
                 <a:moveTo>
                   <a:pt x="0" y="0"/>
                 </a:moveTo>
                 <a:lnTo>
-                  <a:pt x="581025" y="0"/>
-                </a:lnTo>
-                <a:lnTo>
-                  <a:pt x="581025" y="561975"/>
-                </a:lnTo>
-                <a:lnTo>
-                  <a:pt x="0" y="561975"/>
+                  <a:pt x="962025" y="0"/>
+                </a:lnTo>
+                <a:lnTo>
+                  <a:pt x="962025" y="942975"/>
+                </a:lnTo>
+                <a:lnTo>
+                  <a:pt x="0" y="942975"/>
                 </a:lnTo>
                 <a:lnTo>
                   <a:pt x="0" y="0"/>
@@ -5128,79 +4592,19 @@
           <a:blipFill>
             <a:blip r:embed="rId24"/>
             <a:stretch>
-              <a:fillRect/>
+              <a:fillRect l="0" t="0" r="0" b="0"/>
             </a:stretch>
           </a:blipFill>
         </p:spPr>
-        <p:txBody>
-          <a:bodyPr/>
-          <a:lstStyle/>
-          <a:p>
-            <a:endParaRPr lang="en-GB"/>
-          </a:p>
-        </p:txBody>
-      </p:sp>
-      <p:sp>
-        <p:nvSpPr>
-          <p:cNvPr id="35" name="Freeform 35"/>
-          <p:cNvSpPr/>
-          <p:nvPr/>
-        </p:nvSpPr>
-        <p:spPr>
-          <a:xfrm>
-            <a:off x="10258425" y="2590800"/>
-            <a:ext cx="962025" cy="942975"/>
-          </a:xfrm>
-          <a:custGeom>
-            <a:avLst/>
-            <a:gdLst/>
-            <a:ahLst/>
-            <a:cxnLst/>
-            <a:rect l="l" t="t" r="r" b="b"/>
-            <a:pathLst>
-              <a:path w="962025" h="942975">
-                <a:moveTo>
-                  <a:pt x="0" y="0"/>
-                </a:moveTo>
-                <a:lnTo>
-                  <a:pt x="962025" y="0"/>
-                </a:lnTo>
-                <a:lnTo>
-                  <a:pt x="962025" y="942975"/>
-                </a:lnTo>
-                <a:lnTo>
-                  <a:pt x="0" y="942975"/>
-                </a:lnTo>
-                <a:lnTo>
-                  <a:pt x="0" y="0"/>
-                </a:lnTo>
-                <a:close/>
-              </a:path>
-            </a:pathLst>
-          </a:custGeom>
-          <a:blipFill>
-            <a:blip r:embed="rId25"/>
-            <a:stretch>
-              <a:fillRect/>
-            </a:stretch>
-          </a:blipFill>
-        </p:spPr>
-        <p:txBody>
-          <a:bodyPr/>
-          <a:lstStyle/>
-          <a:p>
-            <a:endParaRPr lang="en-GB"/>
-          </a:p>
-        </p:txBody>
-      </p:sp>
-      <p:sp>
-        <p:nvSpPr>
-          <p:cNvPr id="36" name="TextBox 36"/>
-          <p:cNvSpPr txBox="1"/>
-          <p:nvPr/>
-        </p:nvSpPr>
-        <p:spPr>
-          <a:xfrm>
+      </p:sp>
+      <p:sp>
+        <p:nvSpPr>
+          <p:cNvPr name="TextBox 36" id="36"/>
+          <p:cNvSpPr txBox="true"/>
+          <p:nvPr/>
+        </p:nvSpPr>
+        <p:spPr>
+          <a:xfrm rot="0">
             <a:off x="10212934" y="3719734"/>
             <a:ext cx="979322" cy="433678"/>
           </a:xfrm>
@@ -5209,7 +4613,7 @@
           </a:prstGeom>
         </p:spPr>
         <p:txBody>
-          <a:bodyPr lIns="0" tIns="0" rIns="0" bIns="0" rtlCol="0" anchor="t">
+          <a:bodyPr anchor="t" rtlCol="false" tIns="0" lIns="0" bIns="0" rIns="0">
             <a:spAutoFit/>
           </a:bodyPr>
           <a:lstStyle/>
@@ -5236,12 +4640,12 @@
       </p:sp>
       <p:sp>
         <p:nvSpPr>
-          <p:cNvPr id="37" name="Freeform 37"/>
+          <p:cNvPr name="Freeform 37" id="37"/>
           <p:cNvSpPr/>
           <p:nvPr/>
         </p:nvSpPr>
         <p:spPr>
-          <a:xfrm>
+          <a:xfrm flipH="false" flipV="false" rot="0">
             <a:off x="9877425" y="4257675"/>
             <a:ext cx="1724025" cy="200025"/>
           </a:xfrm>
@@ -5250,9 +4654,9 @@
             <a:gdLst/>
             <a:ahLst/>
             <a:cxnLst/>
-            <a:rect l="l" t="t" r="r" b="b"/>
+            <a:rect r="r" b="b" t="t" l="l"/>
             <a:pathLst>
-              <a:path w="1724025" h="200025">
+              <a:path h="200025" w="1724025">
                 <a:moveTo>
                   <a:pt x="0" y="0"/>
                 </a:moveTo>
@@ -5273,28 +4677,21 @@
             </a:pathLst>
           </a:custGeom>
           <a:blipFill>
-            <a:blip r:embed="rId26"/>
+            <a:blip r:embed="rId25"/>
             <a:stretch>
-              <a:fillRect/>
+              <a:fillRect l="0" t="0" r="0" b="0"/>
             </a:stretch>
           </a:blipFill>
         </p:spPr>
-        <p:txBody>
-          <a:bodyPr/>
-          <a:lstStyle/>
-          <a:p>
-            <a:endParaRPr lang="en-GB"/>
-          </a:p>
-        </p:txBody>
-      </p:sp>
-      <p:sp>
-        <p:nvSpPr>
-          <p:cNvPr id="38" name="TextBox 38"/>
-          <p:cNvSpPr txBox="1"/>
-          <p:nvPr/>
-        </p:nvSpPr>
-        <p:spPr>
-          <a:xfrm>
+      </p:sp>
+      <p:sp>
+        <p:nvSpPr>
+          <p:cNvPr name="TextBox 38" id="38"/>
+          <p:cNvSpPr txBox="true"/>
+          <p:nvPr/>
+        </p:nvSpPr>
+        <p:spPr>
+          <a:xfrm rot="0">
             <a:off x="9968103" y="4568442"/>
             <a:ext cx="1434008" cy="885825"/>
           </a:xfrm>
@@ -5303,7 +4700,7 @@
           </a:prstGeom>
         </p:spPr>
         <p:txBody>
-          <a:bodyPr lIns="0" tIns="0" rIns="0" bIns="0" rtlCol="0" anchor="t">
+          <a:bodyPr anchor="t" rtlCol="false" tIns="0" lIns="0" bIns="0" rIns="0">
             <a:spAutoFit/>
           </a:bodyPr>
           <a:lstStyle/>
@@ -5330,12 +4727,12 @@
       </p:sp>
       <p:sp>
         <p:nvSpPr>
-          <p:cNvPr id="39" name="Freeform 39"/>
+          <p:cNvPr name="Freeform 39" id="39"/>
           <p:cNvSpPr/>
           <p:nvPr/>
         </p:nvSpPr>
         <p:spPr>
-          <a:xfrm>
+          <a:xfrm flipH="false" flipV="false" rot="0">
             <a:off x="2276475" y="2962275"/>
             <a:ext cx="581025" cy="381000"/>
           </a:xfrm>
@@ -5344,9 +4741,9 @@
             <a:gdLst/>
             <a:ahLst/>
             <a:cxnLst/>
-            <a:rect l="l" t="t" r="r" b="b"/>
+            <a:rect r="r" b="b" t="t" l="l"/>
             <a:pathLst>
-              <a:path w="581025" h="381000">
+              <a:path h="381000" w="581025">
                 <a:moveTo>
                   <a:pt x="0" y="0"/>
                 </a:moveTo>
@@ -5355,6 +4752,52 @@
                 </a:lnTo>
                 <a:lnTo>
                   <a:pt x="581025" y="381000"/>
+                </a:lnTo>
+                <a:lnTo>
+                  <a:pt x="0" y="381000"/>
+                </a:lnTo>
+                <a:lnTo>
+                  <a:pt x="0" y="0"/>
+                </a:lnTo>
+                <a:close/>
+              </a:path>
+            </a:pathLst>
+          </a:custGeom>
+          <a:blipFill>
+            <a:blip r:embed="rId26"/>
+            <a:stretch>
+              <a:fillRect l="0" t="0" r="0" b="0"/>
+            </a:stretch>
+          </a:blipFill>
+        </p:spPr>
+      </p:sp>
+      <p:sp>
+        <p:nvSpPr>
+          <p:cNvPr name="Freeform 40" id="40"/>
+          <p:cNvSpPr/>
+          <p:nvPr/>
+        </p:nvSpPr>
+        <p:spPr>
+          <a:xfrm flipH="false" flipV="false" rot="0">
+            <a:off x="4743450" y="2962275"/>
+            <a:ext cx="390525" cy="381000"/>
+          </a:xfrm>
+          <a:custGeom>
+            <a:avLst/>
+            <a:gdLst/>
+            <a:ahLst/>
+            <a:cxnLst/>
+            <a:rect r="r" b="b" t="t" l="l"/>
+            <a:pathLst>
+              <a:path h="381000" w="390525">
+                <a:moveTo>
+                  <a:pt x="0" y="0"/>
+                </a:moveTo>
+                <a:lnTo>
+                  <a:pt x="390525" y="0"/>
+                </a:lnTo>
+                <a:lnTo>
+                  <a:pt x="390525" y="381000"/>
                 </a:lnTo>
                 <a:lnTo>
                   <a:pt x="0" y="381000"/>
@@ -5369,45 +4812,38 @@
           <a:blipFill>
             <a:blip r:embed="rId27"/>
             <a:stretch>
-              <a:fillRect/>
+              <a:fillRect l="0" t="0" r="0" b="0"/>
             </a:stretch>
           </a:blipFill>
         </p:spPr>
-        <p:txBody>
-          <a:bodyPr/>
-          <a:lstStyle/>
-          <a:p>
-            <a:endParaRPr lang="en-GB"/>
-          </a:p>
-        </p:txBody>
-      </p:sp>
-      <p:sp>
-        <p:nvSpPr>
-          <p:cNvPr id="40" name="Freeform 40"/>
+      </p:sp>
+      <p:sp>
+        <p:nvSpPr>
+          <p:cNvPr name="Freeform 41" id="41"/>
           <p:cNvSpPr/>
           <p:nvPr/>
         </p:nvSpPr>
         <p:spPr>
-          <a:xfrm>
-            <a:off x="4743450" y="2962275"/>
-            <a:ext cx="390525" cy="381000"/>
+          <a:xfrm flipH="false" flipV="false" rot="0">
+            <a:off x="7029450" y="2962275"/>
+            <a:ext cx="581025" cy="381000"/>
           </a:xfrm>
           <a:custGeom>
             <a:avLst/>
             <a:gdLst/>
             <a:ahLst/>
             <a:cxnLst/>
-            <a:rect l="l" t="t" r="r" b="b"/>
+            <a:rect r="r" b="b" t="t" l="l"/>
             <a:pathLst>
-              <a:path w="390525" h="381000">
+              <a:path h="381000" w="581025">
                 <a:moveTo>
                   <a:pt x="0" y="0"/>
                 </a:moveTo>
                 <a:lnTo>
-                  <a:pt x="390525" y="0"/>
-                </a:lnTo>
-                <a:lnTo>
-                  <a:pt x="390525" y="381000"/>
+                  <a:pt x="581025" y="0"/>
+                </a:lnTo>
+                <a:lnTo>
+                  <a:pt x="581025" y="381000"/>
                 </a:lnTo>
                 <a:lnTo>
                   <a:pt x="0" y="381000"/>
@@ -5422,27 +4858,20 @@
           <a:blipFill>
             <a:blip r:embed="rId28"/>
             <a:stretch>
-              <a:fillRect/>
+              <a:fillRect l="0" t="0" r="0" b="0"/>
             </a:stretch>
           </a:blipFill>
         </p:spPr>
-        <p:txBody>
-          <a:bodyPr/>
-          <a:lstStyle/>
-          <a:p>
-            <a:endParaRPr lang="en-GB"/>
-          </a:p>
-        </p:txBody>
-      </p:sp>
-      <p:sp>
-        <p:nvSpPr>
-          <p:cNvPr id="41" name="Freeform 41"/>
+      </p:sp>
+      <p:sp>
+        <p:nvSpPr>
+          <p:cNvPr name="Freeform 42" id="42"/>
           <p:cNvSpPr/>
           <p:nvPr/>
         </p:nvSpPr>
         <p:spPr>
-          <a:xfrm>
-            <a:off x="7029450" y="2962275"/>
+          <a:xfrm flipH="false" flipV="false" rot="0">
+            <a:off x="9305925" y="2962275"/>
             <a:ext cx="581025" cy="381000"/>
           </a:xfrm>
           <a:custGeom>
@@ -5450,9 +4879,9 @@
             <a:gdLst/>
             <a:ahLst/>
             <a:cxnLst/>
-            <a:rect l="l" t="t" r="r" b="b"/>
+            <a:rect r="r" b="b" t="t" l="l"/>
             <a:pathLst>
-              <a:path w="581025" h="381000">
+              <a:path h="381000" w="581025">
                 <a:moveTo>
                   <a:pt x="0" y="0"/>
                 </a:moveTo>
@@ -5475,48 +4904,41 @@
           <a:blipFill>
             <a:blip r:embed="rId29"/>
             <a:stretch>
-              <a:fillRect/>
+              <a:fillRect l="0" t="0" r="0" b="0"/>
             </a:stretch>
           </a:blipFill>
         </p:spPr>
-        <p:txBody>
-          <a:bodyPr/>
-          <a:lstStyle/>
-          <a:p>
-            <a:endParaRPr lang="en-GB"/>
-          </a:p>
-        </p:txBody>
-      </p:sp>
-      <p:sp>
-        <p:nvSpPr>
-          <p:cNvPr id="42" name="Freeform 42"/>
+      </p:sp>
+      <p:sp>
+        <p:nvSpPr>
+          <p:cNvPr name="Freeform 43" id="43"/>
           <p:cNvSpPr/>
           <p:nvPr/>
         </p:nvSpPr>
         <p:spPr>
-          <a:xfrm>
-            <a:off x="9305925" y="2962275"/>
-            <a:ext cx="581025" cy="381000"/>
+          <a:xfrm flipH="false" flipV="false" rot="0">
+            <a:off x="349758" y="6026920"/>
+            <a:ext cx="4762500" cy="1123950"/>
           </a:xfrm>
           <a:custGeom>
             <a:avLst/>
             <a:gdLst/>
             <a:ahLst/>
             <a:cxnLst/>
-            <a:rect l="l" t="t" r="r" b="b"/>
+            <a:rect r="r" b="b" t="t" l="l"/>
             <a:pathLst>
-              <a:path w="581025" h="381000">
+              <a:path h="1123950" w="4762500">
                 <a:moveTo>
                   <a:pt x="0" y="0"/>
                 </a:moveTo>
                 <a:lnTo>
-                  <a:pt x="581025" y="0"/>
-                </a:lnTo>
-                <a:lnTo>
-                  <a:pt x="581025" y="381000"/>
-                </a:lnTo>
-                <a:lnTo>
-                  <a:pt x="0" y="381000"/>
+                  <a:pt x="4762500" y="0"/>
+                </a:lnTo>
+                <a:lnTo>
+                  <a:pt x="4762500" y="1123950"/>
+                </a:lnTo>
+                <a:lnTo>
+                  <a:pt x="0" y="1123950"/>
                 </a:lnTo>
                 <a:lnTo>
                   <a:pt x="0" y="0"/>
@@ -5528,79 +4950,19 @@
           <a:blipFill>
             <a:blip r:embed="rId30"/>
             <a:stretch>
-              <a:fillRect/>
+              <a:fillRect l="0" t="0" r="0" b="0"/>
             </a:stretch>
           </a:blipFill>
         </p:spPr>
-        <p:txBody>
-          <a:bodyPr/>
-          <a:lstStyle/>
-          <a:p>
-            <a:endParaRPr lang="en-GB"/>
-          </a:p>
-        </p:txBody>
-      </p:sp>
-      <p:sp>
-        <p:nvSpPr>
-          <p:cNvPr id="43" name="Freeform 43"/>
-          <p:cNvSpPr/>
-          <p:nvPr/>
-        </p:nvSpPr>
-        <p:spPr>
-          <a:xfrm>
-            <a:off x="349758" y="6026920"/>
-            <a:ext cx="4762500" cy="1123950"/>
-          </a:xfrm>
-          <a:custGeom>
-            <a:avLst/>
-            <a:gdLst/>
-            <a:ahLst/>
-            <a:cxnLst/>
-            <a:rect l="l" t="t" r="r" b="b"/>
-            <a:pathLst>
-              <a:path w="4762500" h="1123950">
-                <a:moveTo>
-                  <a:pt x="0" y="0"/>
-                </a:moveTo>
-                <a:lnTo>
-                  <a:pt x="4762500" y="0"/>
-                </a:lnTo>
-                <a:lnTo>
-                  <a:pt x="4762500" y="1123950"/>
-                </a:lnTo>
-                <a:lnTo>
-                  <a:pt x="0" y="1123950"/>
-                </a:lnTo>
-                <a:lnTo>
-                  <a:pt x="0" y="0"/>
-                </a:lnTo>
-                <a:close/>
-              </a:path>
-            </a:pathLst>
-          </a:custGeom>
-          <a:blipFill>
-            <a:blip r:embed="rId31"/>
-            <a:stretch>
-              <a:fillRect/>
-            </a:stretch>
-          </a:blipFill>
-        </p:spPr>
-        <p:txBody>
-          <a:bodyPr/>
-          <a:lstStyle/>
-          <a:p>
-            <a:endParaRPr lang="en-GB"/>
-          </a:p>
-        </p:txBody>
-      </p:sp>
-      <p:sp>
-        <p:nvSpPr>
-          <p:cNvPr id="44" name="TextBox 44"/>
-          <p:cNvSpPr txBox="1"/>
-          <p:nvPr/>
-        </p:nvSpPr>
-        <p:spPr>
-          <a:xfrm>
+      </p:sp>
+      <p:sp>
+        <p:nvSpPr>
+          <p:cNvPr name="TextBox 44" id="44"/>
+          <p:cNvSpPr txBox="true"/>
+          <p:nvPr/>
+        </p:nvSpPr>
+        <p:spPr>
+          <a:xfrm rot="0">
             <a:off x="1364056" y="2191042"/>
             <a:ext cx="122415" cy="259906"/>
           </a:xfrm>
@@ -5609,7 +4971,7 @@
           </a:prstGeom>
         </p:spPr>
         <p:txBody>
-          <a:bodyPr lIns="0" tIns="0" rIns="0" bIns="0" rtlCol="0" anchor="t">
+          <a:bodyPr anchor="t" rtlCol="false" tIns="0" lIns="0" bIns="0" rIns="0">
             <a:spAutoFit/>
           </a:bodyPr>
           <a:lstStyle/>
@@ -5636,12 +4998,12 @@
       </p:sp>
       <p:sp>
         <p:nvSpPr>
-          <p:cNvPr id="45" name="TextBox 45"/>
-          <p:cNvSpPr txBox="1"/>
-          <p:nvPr/>
-        </p:nvSpPr>
-        <p:spPr>
-          <a:xfrm>
+          <p:cNvPr name="TextBox 45" id="45"/>
+          <p:cNvSpPr txBox="true"/>
+          <p:nvPr/>
+        </p:nvSpPr>
+        <p:spPr>
+          <a:xfrm rot="0">
             <a:off x="3707435" y="2191042"/>
             <a:ext cx="157391" cy="259906"/>
           </a:xfrm>
@@ -5650,7 +5012,7 @@
           </a:prstGeom>
         </p:spPr>
         <p:txBody>
-          <a:bodyPr lIns="0" tIns="0" rIns="0" bIns="0" rtlCol="0" anchor="t">
+          <a:bodyPr anchor="t" rtlCol="false" tIns="0" lIns="0" bIns="0" rIns="0">
             <a:spAutoFit/>
           </a:bodyPr>
           <a:lstStyle/>
@@ -5677,12 +5039,12 @@
       </p:sp>
       <p:sp>
         <p:nvSpPr>
-          <p:cNvPr id="46" name="TextBox 46"/>
-          <p:cNvSpPr txBox="1"/>
-          <p:nvPr/>
-        </p:nvSpPr>
-        <p:spPr>
-          <a:xfrm>
+          <p:cNvPr name="TextBox 46" id="46"/>
+          <p:cNvSpPr txBox="true"/>
+          <p:nvPr/>
+        </p:nvSpPr>
+        <p:spPr>
+          <a:xfrm rot="0">
             <a:off x="6068301" y="2191042"/>
             <a:ext cx="157391" cy="259906"/>
           </a:xfrm>
@@ -5691,7 +5053,7 @@
           </a:prstGeom>
         </p:spPr>
         <p:txBody>
-          <a:bodyPr lIns="0" tIns="0" rIns="0" bIns="0" rtlCol="0" anchor="t">
+          <a:bodyPr anchor="t" rtlCol="false" tIns="0" lIns="0" bIns="0" rIns="0">
             <a:spAutoFit/>
           </a:bodyPr>
           <a:lstStyle/>
@@ -5718,12 +5080,12 @@
       </p:sp>
       <p:sp>
         <p:nvSpPr>
-          <p:cNvPr id="47" name="TextBox 47"/>
-          <p:cNvSpPr txBox="1"/>
-          <p:nvPr/>
-        </p:nvSpPr>
-        <p:spPr>
-          <a:xfrm>
+          <p:cNvPr name="TextBox 47" id="47"/>
+          <p:cNvSpPr txBox="true"/>
+          <p:nvPr/>
+        </p:nvSpPr>
+        <p:spPr>
+          <a:xfrm rot="0">
             <a:off x="8359216" y="2191042"/>
             <a:ext cx="157391" cy="259906"/>
           </a:xfrm>
@@ -5732,7 +5094,7 @@
           </a:prstGeom>
         </p:spPr>
         <p:txBody>
-          <a:bodyPr lIns="0" tIns="0" rIns="0" bIns="0" rtlCol="0" anchor="t">
+          <a:bodyPr anchor="t" rtlCol="false" tIns="0" lIns="0" bIns="0" rIns="0">
             <a:spAutoFit/>
           </a:bodyPr>
           <a:lstStyle/>
@@ -5759,12 +5121,12 @@
       </p:sp>
       <p:sp>
         <p:nvSpPr>
-          <p:cNvPr id="48" name="TextBox 48"/>
-          <p:cNvSpPr txBox="1"/>
-          <p:nvPr/>
-        </p:nvSpPr>
-        <p:spPr>
-          <a:xfrm>
+          <p:cNvPr name="TextBox 48" id="48"/>
+          <p:cNvSpPr txBox="true"/>
+          <p:nvPr/>
+        </p:nvSpPr>
+        <p:spPr>
+          <a:xfrm rot="0">
             <a:off x="10615155" y="2191042"/>
             <a:ext cx="157391" cy="259906"/>
           </a:xfrm>
@@ -5773,7 +5135,7 @@
           </a:prstGeom>
         </p:spPr>
         <p:txBody>
-          <a:bodyPr lIns="0" tIns="0" rIns="0" bIns="0" rtlCol="0" anchor="t">
+          <a:bodyPr anchor="t" rtlCol="false" tIns="0" lIns="0" bIns="0" rIns="0">
             <a:spAutoFit/>
           </a:bodyPr>
           <a:lstStyle/>
@@ -5800,12 +5162,12 @@
       </p:sp>
       <p:sp>
         <p:nvSpPr>
-          <p:cNvPr id="49" name="TextBox 49"/>
-          <p:cNvSpPr txBox="1"/>
-          <p:nvPr/>
-        </p:nvSpPr>
-        <p:spPr>
-          <a:xfrm>
+          <p:cNvPr name="TextBox 49" id="49"/>
+          <p:cNvSpPr txBox="true"/>
+          <p:nvPr/>
+        </p:nvSpPr>
+        <p:spPr>
+          <a:xfrm rot="0">
             <a:off x="12486361" y="1799185"/>
             <a:ext cx="4336999" cy="201476"/>
           </a:xfrm>
@@ -5814,7 +5176,7 @@
           </a:prstGeom>
         </p:spPr>
         <p:txBody>
-          <a:bodyPr lIns="0" tIns="0" rIns="0" bIns="0" rtlCol="0" anchor="t">
+          <a:bodyPr anchor="t" rtlCol="false" tIns="0" lIns="0" bIns="0" rIns="0">
             <a:spAutoFit/>
           </a:bodyPr>
           <a:lstStyle/>
@@ -5841,12 +5203,12 @@
       </p:sp>
       <p:sp>
         <p:nvSpPr>
-          <p:cNvPr id="50" name="TextBox 50"/>
-          <p:cNvSpPr txBox="1"/>
-          <p:nvPr/>
-        </p:nvSpPr>
-        <p:spPr>
-          <a:xfrm>
+          <p:cNvPr name="TextBox 50" id="50"/>
+          <p:cNvSpPr txBox="true"/>
+          <p:nvPr/>
+        </p:nvSpPr>
+        <p:spPr>
+          <a:xfrm rot="0">
             <a:off x="13045973" y="2448835"/>
             <a:ext cx="2378354" cy="495300"/>
           </a:xfrm>
@@ -5855,7 +5217,7 @@
           </a:prstGeom>
         </p:spPr>
         <p:txBody>
-          <a:bodyPr lIns="0" tIns="0" rIns="0" bIns="0" rtlCol="0" anchor="t">
+          <a:bodyPr anchor="t" rtlCol="false" tIns="0" lIns="0" bIns="0" rIns="0">
             <a:spAutoFit/>
           </a:bodyPr>
           <a:lstStyle/>
@@ -5882,12 +5244,12 @@
       </p:sp>
       <p:sp>
         <p:nvSpPr>
-          <p:cNvPr id="51" name="TextBox 51"/>
-          <p:cNvSpPr txBox="1"/>
-          <p:nvPr/>
-        </p:nvSpPr>
-        <p:spPr>
-          <a:xfrm>
+          <p:cNvPr name="TextBox 51" id="51"/>
+          <p:cNvSpPr txBox="true"/>
+          <p:nvPr/>
+        </p:nvSpPr>
+        <p:spPr>
+          <a:xfrm rot="0">
             <a:off x="13045973" y="3338593"/>
             <a:ext cx="2780576" cy="495300"/>
           </a:xfrm>
@@ -5896,7 +5258,7 @@
           </a:prstGeom>
         </p:spPr>
         <p:txBody>
-          <a:bodyPr lIns="0" tIns="0" rIns="0" bIns="0" rtlCol="0" anchor="t">
+          <a:bodyPr anchor="t" rtlCol="false" tIns="0" lIns="0" bIns="0" rIns="0">
             <a:spAutoFit/>
           </a:bodyPr>
           <a:lstStyle/>
@@ -5923,12 +5285,12 @@
       </p:sp>
       <p:sp>
         <p:nvSpPr>
-          <p:cNvPr id="52" name="TextBox 52"/>
-          <p:cNvSpPr txBox="1"/>
-          <p:nvPr/>
-        </p:nvSpPr>
-        <p:spPr>
-          <a:xfrm>
+          <p:cNvPr name="TextBox 52" id="52"/>
+          <p:cNvSpPr txBox="true"/>
+          <p:nvPr/>
+        </p:nvSpPr>
+        <p:spPr>
+          <a:xfrm rot="0">
             <a:off x="13045973" y="4228352"/>
             <a:ext cx="3602507" cy="495300"/>
           </a:xfrm>
@@ -5937,7 +5299,7 @@
           </a:prstGeom>
         </p:spPr>
         <p:txBody>
-          <a:bodyPr lIns="0" tIns="0" rIns="0" bIns="0" rtlCol="0" anchor="t">
+          <a:bodyPr anchor="t" rtlCol="false" tIns="0" lIns="0" bIns="0" rIns="0">
             <a:spAutoFit/>
           </a:bodyPr>
           <a:lstStyle/>
@@ -5964,12 +5326,12 @@
       </p:sp>
       <p:sp>
         <p:nvSpPr>
-          <p:cNvPr id="53" name="TextBox 53"/>
-          <p:cNvSpPr txBox="1"/>
-          <p:nvPr/>
-        </p:nvSpPr>
-        <p:spPr>
-          <a:xfrm>
+          <p:cNvPr name="TextBox 53" id="53"/>
+          <p:cNvSpPr txBox="true"/>
+          <p:nvPr/>
+        </p:nvSpPr>
+        <p:spPr>
+          <a:xfrm rot="0">
             <a:off x="13045973" y="5118111"/>
             <a:ext cx="2780576" cy="495300"/>
           </a:xfrm>
@@ -5978,7 +5340,7 @@
           </a:prstGeom>
         </p:spPr>
         <p:txBody>
-          <a:bodyPr lIns="0" tIns="0" rIns="0" bIns="0" rtlCol="0" anchor="t">
+          <a:bodyPr anchor="t" rtlCol="false" tIns="0" lIns="0" bIns="0" rIns="0">
             <a:spAutoFit/>
           </a:bodyPr>
           <a:lstStyle/>
@@ -6005,12 +5367,12 @@
       </p:sp>
       <p:sp>
         <p:nvSpPr>
-          <p:cNvPr id="54" name="TextBox 54"/>
-          <p:cNvSpPr txBox="1"/>
-          <p:nvPr/>
-        </p:nvSpPr>
-        <p:spPr>
-          <a:xfrm>
+          <p:cNvPr name="TextBox 54" id="54"/>
+          <p:cNvSpPr txBox="true"/>
+          <p:nvPr/>
+        </p:nvSpPr>
+        <p:spPr>
+          <a:xfrm rot="0">
             <a:off x="13045973" y="6007870"/>
             <a:ext cx="3042895" cy="495300"/>
           </a:xfrm>
@@ -6019,7 +5381,7 @@
           </a:prstGeom>
         </p:spPr>
         <p:txBody>
-          <a:bodyPr lIns="0" tIns="0" rIns="0" bIns="0" rtlCol="0" anchor="t">
+          <a:bodyPr anchor="t" rtlCol="false" tIns="0" lIns="0" bIns="0" rIns="0">
             <a:spAutoFit/>
           </a:bodyPr>
           <a:lstStyle/>
@@ -6046,12 +5408,12 @@
       </p:sp>
       <p:sp>
         <p:nvSpPr>
-          <p:cNvPr id="55" name="TextBox 55"/>
-          <p:cNvSpPr txBox="1"/>
-          <p:nvPr/>
-        </p:nvSpPr>
-        <p:spPr>
-          <a:xfrm>
+          <p:cNvPr name="TextBox 55" id="55"/>
+          <p:cNvSpPr txBox="true"/>
+          <p:nvPr/>
+        </p:nvSpPr>
+        <p:spPr>
+          <a:xfrm rot="0">
             <a:off x="1908734" y="6349061"/>
             <a:ext cx="1801254" cy="411927"/>
           </a:xfrm>
@@ -6060,7 +5422,7 @@
           </a:prstGeom>
         </p:spPr>
         <p:txBody>
-          <a:bodyPr lIns="0" tIns="0" rIns="0" bIns="0" rtlCol="0" anchor="t">
+          <a:bodyPr anchor="t" rtlCol="false" tIns="0" lIns="0" bIns="0" rIns="0">
             <a:spAutoFit/>
           </a:bodyPr>
           <a:lstStyle/>
@@ -6106,12 +5468,12 @@
       </p:sp>
       <p:sp>
         <p:nvSpPr>
-          <p:cNvPr id="56" name="TextBox 56"/>
-          <p:cNvSpPr txBox="1"/>
-          <p:nvPr/>
-        </p:nvSpPr>
-        <p:spPr>
-          <a:xfrm>
+          <p:cNvPr name="TextBox 56" id="56"/>
+          <p:cNvSpPr txBox="true"/>
+          <p:nvPr/>
+        </p:nvSpPr>
+        <p:spPr>
+          <a:xfrm rot="0">
             <a:off x="5736031" y="6331845"/>
             <a:ext cx="1696326" cy="358899"/>
           </a:xfrm>
@@ -6120,7 +5482,7 @@
           </a:prstGeom>
         </p:spPr>
         <p:txBody>
-          <a:bodyPr lIns="0" tIns="0" rIns="0" bIns="0" rtlCol="0" anchor="t">
+          <a:bodyPr anchor="t" rtlCol="false" tIns="0" lIns="0" bIns="0" rIns="0">
             <a:spAutoFit/>
           </a:bodyPr>
           <a:lstStyle/>
@@ -6166,12 +5528,12 @@
       </p:sp>
       <p:sp>
         <p:nvSpPr>
-          <p:cNvPr id="57" name="TextBox 57"/>
-          <p:cNvSpPr txBox="1"/>
-          <p:nvPr/>
-        </p:nvSpPr>
-        <p:spPr>
-          <a:xfrm>
+          <p:cNvPr name="TextBox 57" id="57"/>
+          <p:cNvSpPr txBox="true"/>
+          <p:nvPr/>
+        </p:nvSpPr>
+        <p:spPr>
+          <a:xfrm rot="0">
             <a:off x="3899802" y="6248896"/>
             <a:ext cx="437198" cy="566983"/>
           </a:xfrm>
@@ -6180,7 +5542,7 @@
           </a:prstGeom>
         </p:spPr>
         <p:txBody>
-          <a:bodyPr lIns="0" tIns="0" rIns="0" bIns="0" rtlCol="0" anchor="t">
+          <a:bodyPr anchor="t" rtlCol="false" tIns="0" lIns="0" bIns="0" rIns="0">
             <a:spAutoFit/>
           </a:bodyPr>
           <a:lstStyle/>
@@ -6207,12 +5569,12 @@
       </p:sp>
       <p:sp>
         <p:nvSpPr>
-          <p:cNvPr id="58" name="TextBox 58"/>
-          <p:cNvSpPr txBox="1"/>
-          <p:nvPr/>
-        </p:nvSpPr>
-        <p:spPr>
-          <a:xfrm>
+          <p:cNvPr name="TextBox 58" id="58"/>
+          <p:cNvSpPr txBox="true"/>
+          <p:nvPr/>
+        </p:nvSpPr>
+        <p:spPr>
+          <a:xfrm rot="0">
             <a:off x="7817091" y="6248896"/>
             <a:ext cx="437198" cy="566983"/>
           </a:xfrm>
@@ -6221,7 +5583,7 @@
           </a:prstGeom>
         </p:spPr>
         <p:txBody>
-          <a:bodyPr lIns="0" tIns="0" rIns="0" bIns="0" rtlCol="0" anchor="t">
+          <a:bodyPr anchor="t" rtlCol="false" tIns="0" lIns="0" bIns="0" rIns="0">
             <a:spAutoFit/>
           </a:bodyPr>
           <a:lstStyle/>
@@ -6248,12 +5610,12 @@
       </p:sp>
       <p:sp>
         <p:nvSpPr>
-          <p:cNvPr id="59" name="TextBox 59"/>
-          <p:cNvSpPr txBox="1"/>
-          <p:nvPr/>
-        </p:nvSpPr>
-        <p:spPr>
-          <a:xfrm>
+          <p:cNvPr name="TextBox 59" id="59"/>
+          <p:cNvSpPr txBox="true"/>
+          <p:nvPr/>
+        </p:nvSpPr>
+        <p:spPr>
+          <a:xfrm rot="0">
             <a:off x="9670809" y="6227588"/>
             <a:ext cx="1573911" cy="533400"/>
           </a:xfrm>
@@ -6262,7 +5624,7 @@
           </a:prstGeom>
         </p:spPr>
         <p:txBody>
-          <a:bodyPr lIns="0" tIns="0" rIns="0" bIns="0" rtlCol="0" anchor="t">
+          <a:bodyPr anchor="t" rtlCol="false" tIns="0" lIns="0" bIns="0" rIns="0">
             <a:spAutoFit/>
           </a:bodyPr>
           <a:lstStyle/>
@@ -6308,12 +5670,12 @@
       </p:sp>
       <p:sp>
         <p:nvSpPr>
-          <p:cNvPr id="60" name="TextBox 60"/>
-          <p:cNvSpPr txBox="1"/>
-          <p:nvPr/>
-        </p:nvSpPr>
-        <p:spPr>
-          <a:xfrm>
+          <p:cNvPr name="TextBox 60" id="60"/>
+          <p:cNvSpPr txBox="true"/>
+          <p:nvPr/>
+        </p:nvSpPr>
+        <p:spPr>
+          <a:xfrm rot="0">
             <a:off x="1411510" y="7549679"/>
             <a:ext cx="9530906" cy="190150"/>
           </a:xfrm>
@@ -6322,7 +5684,7 @@
           </a:prstGeom>
         </p:spPr>
         <p:txBody>
-          <a:bodyPr lIns="0" tIns="0" rIns="0" bIns="0" rtlCol="0" anchor="t">
+          <a:bodyPr anchor="t" rtlCol="false" tIns="0" lIns="0" bIns="0" rIns="0">
             <a:spAutoFit/>
           </a:bodyPr>
           <a:lstStyle/>
@@ -6333,7 +5695,7 @@
               </a:lnSpc>
             </a:pPr>
             <a:r>
-              <a:rPr lang="en-US" sz="1486" dirty="0">
+              <a:rPr lang="en-US" sz="1486">
                 <a:solidFill>
                   <a:srgbClr val="FFFFFF"/>
                 </a:solidFill>
@@ -6349,12 +5711,217 @@
       </p:sp>
       <p:sp>
         <p:nvSpPr>
-          <p:cNvPr id="66" name="TextBox 66"/>
-          <p:cNvSpPr txBox="1"/>
-          <p:nvPr/>
-        </p:nvSpPr>
-        <p:spPr>
-          <a:xfrm>
+          <p:cNvPr name="TextBox 61" id="61"/>
+          <p:cNvSpPr txBox="true"/>
+          <p:nvPr/>
+        </p:nvSpPr>
+        <p:spPr>
+          <a:xfrm rot="0">
+            <a:off x="11786845" y="7525517"/>
+            <a:ext cx="507149" cy="228600"/>
+          </a:xfrm>
+          <a:prstGeom prst="rect">
+            <a:avLst/>
+          </a:prstGeom>
+        </p:spPr>
+        <p:txBody>
+          <a:bodyPr anchor="t" rtlCol="false" tIns="0" lIns="0" bIns="0" rIns="0">
+            <a:spAutoFit/>
+          </a:bodyPr>
+          <a:lstStyle/>
+          <a:p>
+            <a:pPr algn="ctr">
+              <a:lnSpc>
+                <a:spcPts val="1783"/>
+              </a:lnSpc>
+            </a:pPr>
+            <a:r>
+              <a:rPr lang="en-US" sz="1486">
+                <a:solidFill>
+                  <a:srgbClr val="FFFFFF"/>
+                </a:solidFill>
+                <a:latin typeface="Roboto Condensed"/>
+                <a:ea typeface="Roboto Condensed"/>
+                <a:cs typeface="Roboto Condensed"/>
+                <a:sym typeface="Roboto Condensed"/>
+              </a:rPr>
+              <a:t>Retail</a:t>
+            </a:r>
+          </a:p>
+        </p:txBody>
+      </p:sp>
+      <p:sp>
+        <p:nvSpPr>
+          <p:cNvPr name="TextBox 62" id="62"/>
+          <p:cNvSpPr txBox="true"/>
+          <p:nvPr/>
+        </p:nvSpPr>
+        <p:spPr>
+          <a:xfrm rot="0">
+            <a:off x="12416409" y="7525517"/>
+            <a:ext cx="559613" cy="228600"/>
+          </a:xfrm>
+          <a:prstGeom prst="rect">
+            <a:avLst/>
+          </a:prstGeom>
+        </p:spPr>
+        <p:txBody>
+          <a:bodyPr anchor="t" rtlCol="false" tIns="0" lIns="0" bIns="0" rIns="0">
+            <a:spAutoFit/>
+          </a:bodyPr>
+          <a:lstStyle/>
+          <a:p>
+            <a:pPr algn="ctr">
+              <a:lnSpc>
+                <a:spcPts val="1783"/>
+              </a:lnSpc>
+            </a:pPr>
+            <a:r>
+              <a:rPr lang="en-US" sz="1486">
+                <a:solidFill>
+                  <a:srgbClr val="FFFFFF"/>
+                </a:solidFill>
+                <a:latin typeface="Roboto Condensed"/>
+                <a:ea typeface="Roboto Condensed"/>
+                <a:cs typeface="Roboto Condensed"/>
+                <a:sym typeface="Roboto Condensed"/>
+              </a:rPr>
+              <a:t>Energy</a:t>
+            </a:r>
+          </a:p>
+        </p:txBody>
+      </p:sp>
+      <p:sp>
+        <p:nvSpPr>
+          <p:cNvPr name="TextBox 63" id="63"/>
+          <p:cNvSpPr txBox="true"/>
+          <p:nvPr/>
+        </p:nvSpPr>
+        <p:spPr>
+          <a:xfrm rot="0">
+            <a:off x="13308292" y="7525517"/>
+            <a:ext cx="699516" cy="228600"/>
+          </a:xfrm>
+          <a:prstGeom prst="rect">
+            <a:avLst/>
+          </a:prstGeom>
+        </p:spPr>
+        <p:txBody>
+          <a:bodyPr anchor="t" rtlCol="false" tIns="0" lIns="0" bIns="0" rIns="0">
+            <a:spAutoFit/>
+          </a:bodyPr>
+          <a:lstStyle/>
+          <a:p>
+            <a:pPr algn="ctr">
+              <a:lnSpc>
+                <a:spcPts val="1783"/>
+              </a:lnSpc>
+            </a:pPr>
+            <a:r>
+              <a:rPr lang="en-US" sz="1486">
+                <a:solidFill>
+                  <a:srgbClr val="FFFFFF"/>
+                </a:solidFill>
+                <a:latin typeface="Roboto Condensed"/>
+                <a:ea typeface="Roboto Condensed"/>
+                <a:cs typeface="Roboto Condensed"/>
+                <a:sym typeface="Roboto Condensed"/>
+              </a:rPr>
+              <a:t>Oil &amp; Gas</a:t>
+            </a:r>
+          </a:p>
+        </p:txBody>
+      </p:sp>
+      <p:sp>
+        <p:nvSpPr>
+          <p:cNvPr name="TextBox 64" id="64"/>
+          <p:cNvSpPr txBox="true"/>
+          <p:nvPr/>
+        </p:nvSpPr>
+        <p:spPr>
+          <a:xfrm rot="0">
+            <a:off x="14340078" y="7535042"/>
+            <a:ext cx="1154201" cy="209550"/>
+          </a:xfrm>
+          <a:prstGeom prst="rect">
+            <a:avLst/>
+          </a:prstGeom>
+        </p:spPr>
+        <p:txBody>
+          <a:bodyPr anchor="t" rtlCol="false" tIns="0" lIns="0" bIns="0" rIns="0">
+            <a:spAutoFit/>
+          </a:bodyPr>
+          <a:lstStyle/>
+          <a:p>
+            <a:pPr algn="ctr">
+              <a:lnSpc>
+                <a:spcPts val="1613"/>
+              </a:lnSpc>
+            </a:pPr>
+            <a:r>
+              <a:rPr lang="en-US" sz="1344">
+                <a:solidFill>
+                  <a:srgbClr val="FFFFFF"/>
+                </a:solidFill>
+                <a:latin typeface="Roboto Condensed"/>
+                <a:ea typeface="Roboto Condensed"/>
+                <a:cs typeface="Roboto Condensed"/>
+                <a:sym typeface="Roboto Condensed"/>
+              </a:rPr>
+              <a:t>Pharmaceuticals</a:t>
+            </a:r>
+          </a:p>
+        </p:txBody>
+      </p:sp>
+      <p:sp>
+        <p:nvSpPr>
+          <p:cNvPr name="TextBox 65" id="65"/>
+          <p:cNvSpPr txBox="true"/>
+          <p:nvPr/>
+        </p:nvSpPr>
+        <p:spPr>
+          <a:xfrm rot="0">
+            <a:off x="15844037" y="7539804"/>
+            <a:ext cx="751980" cy="200025"/>
+          </a:xfrm>
+          <a:prstGeom prst="rect">
+            <a:avLst/>
+          </a:prstGeom>
+        </p:spPr>
+        <p:txBody>
+          <a:bodyPr anchor="t" rtlCol="false" tIns="0" lIns="0" bIns="0" rIns="0">
+            <a:spAutoFit/>
+          </a:bodyPr>
+          <a:lstStyle/>
+          <a:p>
+            <a:pPr algn="ctr">
+              <a:lnSpc>
+                <a:spcPts val="1528"/>
+              </a:lnSpc>
+            </a:pPr>
+            <a:r>
+              <a:rPr lang="en-US" sz="1273">
+                <a:solidFill>
+                  <a:srgbClr val="FFFFFF"/>
+                </a:solidFill>
+                <a:latin typeface="Roboto Condensed"/>
+                <a:ea typeface="Roboto Condensed"/>
+                <a:cs typeface="Roboto Condensed"/>
+                <a:sym typeface="Roboto Condensed"/>
+              </a:rPr>
+              <a:t>Automotive</a:t>
+            </a:r>
+          </a:p>
+        </p:txBody>
+      </p:sp>
+      <p:sp>
+        <p:nvSpPr>
+          <p:cNvPr name="TextBox 66" id="66"/>
+          <p:cNvSpPr txBox="true"/>
+          <p:nvPr/>
+        </p:nvSpPr>
+        <p:spPr>
+          <a:xfrm rot="0">
             <a:off x="16945775" y="7525517"/>
             <a:ext cx="174879" cy="228600"/>
           </a:xfrm>
@@ -6363,7 +5930,7 @@
           </a:prstGeom>
         </p:spPr>
         <p:txBody>
-          <a:bodyPr lIns="0" tIns="0" rIns="0" bIns="0" rtlCol="0" anchor="t">
+          <a:bodyPr anchor="t" rtlCol="false" tIns="0" lIns="0" bIns="0" rIns="0">
             <a:spAutoFit/>
           </a:bodyPr>
           <a:lstStyle/>
@@ -6385,58 +5952,6 @@
               </a:rPr>
               <a:t>...</a:t>
             </a:r>
-          </a:p>
-        </p:txBody>
-      </p:sp>
-      <p:sp>
-        <p:nvSpPr>
-          <p:cNvPr id="67" name="Rectangle 66">
-            <a:extLst>
-              <a:ext uri="{FF2B5EF4-FFF2-40B4-BE49-F238E27FC236}">
-                <a16:creationId xmlns:a16="http://schemas.microsoft.com/office/drawing/2014/main" id="{AAEFE33B-5B8B-C2FA-4E30-9AA720F759A1}"/>
-              </a:ext>
-            </a:extLst>
-          </p:cNvPr>
-          <p:cNvSpPr/>
-          <p:nvPr/>
-        </p:nvSpPr>
-        <p:spPr>
-          <a:xfrm>
-            <a:off x="11069477" y="7333114"/>
-            <a:ext cx="6034056" cy="565818"/>
-          </a:xfrm>
-          <a:prstGeom prst="rect">
-            <a:avLst/>
-          </a:prstGeom>
-          <a:solidFill>
-            <a:srgbClr val="095132"/>
-          </a:solidFill>
-          <a:ln>
-            <a:noFill/>
-          </a:ln>
-        </p:spPr>
-        <p:style>
-          <a:lnRef idx="2">
-            <a:schemeClr val="accent1">
-              <a:shade val="15000"/>
-            </a:schemeClr>
-          </a:lnRef>
-          <a:fillRef idx="1">
-            <a:schemeClr val="accent1"/>
-          </a:fillRef>
-          <a:effectRef idx="0">
-            <a:schemeClr val="accent1"/>
-          </a:effectRef>
-          <a:fontRef idx="minor">
-            <a:schemeClr val="lt1"/>
-          </a:fontRef>
-        </p:style>
-        <p:txBody>
-          <a:bodyPr rtlCol="0" anchor="ctr"/>
-          <a:lstStyle/>
-          <a:p>
-            <a:pPr algn="ctr"/>
-            <a:endParaRPr lang="en-GB" dirty="0"/>
           </a:p>
         </p:txBody>
       </p:sp>
@@ -6729,319 +6244,4 @@
   <a:objectDefaults/>
   <a:extraClrSchemeLst/>
 </a:theme>
-</file>
-
-<file path=ppt/theme/theme2.xml><?xml version="1.0" encoding="utf-8"?>
-<a:theme xmlns:a="http://schemas.openxmlformats.org/drawingml/2006/main" name="Office Theme">
-  <a:themeElements>
-    <a:clrScheme name="Office">
-      <a:dk1>
-        <a:sysClr val="windowText" lastClr="000000"/>
-      </a:dk1>
-      <a:lt1>
-        <a:sysClr val="window" lastClr="FFFFFF"/>
-      </a:lt1>
-      <a:dk2>
-        <a:srgbClr val="0E2841"/>
-      </a:dk2>
-      <a:lt2>
-        <a:srgbClr val="E8E8E8"/>
-      </a:lt2>
-      <a:accent1>
-        <a:srgbClr val="156082"/>
-      </a:accent1>
-      <a:accent2>
-        <a:srgbClr val="E97132"/>
-      </a:accent2>
-      <a:accent3>
-        <a:srgbClr val="196B24"/>
-      </a:accent3>
-      <a:accent4>
-        <a:srgbClr val="0F9ED5"/>
-      </a:accent4>
-      <a:accent5>
-        <a:srgbClr val="A02B93"/>
-      </a:accent5>
-      <a:accent6>
-        <a:srgbClr val="4EA72E"/>
-      </a:accent6>
-      <a:hlink>
-        <a:srgbClr val="467886"/>
-      </a:hlink>
-      <a:folHlink>
-        <a:srgbClr val="96607D"/>
-      </a:folHlink>
-    </a:clrScheme>
-    <a:fontScheme name="Office">
-      <a:majorFont>
-        <a:latin typeface="Aptos Display" panose="02110004020202020204"/>
-        <a:ea typeface=""/>
-        <a:cs typeface=""/>
-        <a:font script="Jpan" typeface="游ゴシック Light"/>
-        <a:font script="Hang" typeface="맑은 고딕"/>
-        <a:font script="Hans" typeface="等线 Light"/>
-        <a:font script="Hant" typeface="新細明體"/>
-        <a:font script="Arab" typeface="Times New Roman"/>
-        <a:font script="Hebr" typeface="Times New Roman"/>
-        <a:font script="Thai" typeface="Angsana New"/>
-        <a:font script="Ethi" typeface="Nyala"/>
-        <a:font script="Beng" typeface="Vrinda"/>
-        <a:font script="Gujr" typeface="Shruti"/>
-        <a:font script="Khmr" typeface="MoolBoran"/>
-        <a:font script="Knda" typeface="Tunga"/>
-        <a:font script="Guru" typeface="Raavi"/>
-        <a:font script="Cans" typeface="Euphemia"/>
-        <a:font script="Cher" typeface="Plantagenet Cherokee"/>
-        <a:font script="Yiii" typeface="Microsoft Yi Baiti"/>
-        <a:font script="Tibt" typeface="Microsoft Himalaya"/>
-        <a:font script="Thaa" typeface="MV Boli"/>
-        <a:font script="Deva" typeface="Mangal"/>
-        <a:font script="Telu" typeface="Gautami"/>
-        <a:font script="Taml" typeface="Latha"/>
-        <a:font script="Syrc" typeface="Estrangelo Edessa"/>
-        <a:font script="Orya" typeface="Kalinga"/>
-        <a:font script="Mlym" typeface="Kartika"/>
-        <a:font script="Laoo" typeface="DokChampa"/>
-        <a:font script="Sinh" typeface="Iskoola Pota"/>
-        <a:font script="Mong" typeface="Mongolian Baiti"/>
-        <a:font script="Viet" typeface="Times New Roman"/>
-        <a:font script="Uigh" typeface="Microsoft Uighur"/>
-        <a:font script="Geor" typeface="Sylfaen"/>
-        <a:font script="Armn" typeface="Arial"/>
-        <a:font script="Bugi" typeface="Leelawadee UI"/>
-        <a:font script="Bopo" typeface="Microsoft JhengHei"/>
-        <a:font script="Java" typeface="Javanese Text"/>
-        <a:font script="Lisu" typeface="Segoe UI"/>
-        <a:font script="Mymr" typeface="Myanmar Text"/>
-        <a:font script="Nkoo" typeface="Ebrima"/>
-        <a:font script="Olck" typeface="Nirmala UI"/>
-        <a:font script="Osma" typeface="Ebrima"/>
-        <a:font script="Phag" typeface="Phagspa"/>
-        <a:font script="Syrn" typeface="Estrangelo Edessa"/>
-        <a:font script="Syrj" typeface="Estrangelo Edessa"/>
-        <a:font script="Syre" typeface="Estrangelo Edessa"/>
-        <a:font script="Sora" typeface="Nirmala UI"/>
-        <a:font script="Tale" typeface="Microsoft Tai Le"/>
-        <a:font script="Talu" typeface="Microsoft New Tai Lue"/>
-        <a:font script="Tfng" typeface="Ebrima"/>
-      </a:majorFont>
-      <a:minorFont>
-        <a:latin typeface="Aptos" panose="02110004020202020204"/>
-        <a:ea typeface=""/>
-        <a:cs typeface=""/>
-        <a:font script="Jpan" typeface="游ゴシック"/>
-        <a:font script="Hang" typeface="맑은 고딕"/>
-        <a:font script="Hans" typeface="等线"/>
-        <a:font script="Hant" typeface="新細明體"/>
-        <a:font script="Arab" typeface="Arial"/>
-        <a:font script="Hebr" typeface="Arial"/>
-        <a:font script="Thai" typeface="Cordia New"/>
-        <a:font script="Ethi" typeface="Nyala"/>
-        <a:font script="Beng" typeface="Vrinda"/>
-        <a:font script="Gujr" typeface="Shruti"/>
-        <a:font script="Khmr" typeface="DaunPenh"/>
-        <a:font script="Knda" typeface="Tunga"/>
-        <a:font script="Guru" typeface="Raavi"/>
-        <a:font script="Cans" typeface="Euphemia"/>
-        <a:font script="Cher" typeface="Plantagenet Cherokee"/>
-        <a:font script="Yiii" typeface="Microsoft Yi Baiti"/>
-        <a:font script="Tibt" typeface="Microsoft Himalaya"/>
-        <a:font script="Thaa" typeface="MV Boli"/>
-        <a:font script="Deva" typeface="Mangal"/>
-        <a:font script="Telu" typeface="Gautami"/>
-        <a:font script="Taml" typeface="Latha"/>
-        <a:font script="Syrc" typeface="Estrangelo Edessa"/>
-        <a:font script="Orya" typeface="Kalinga"/>
-        <a:font script="Mlym" typeface="Kartika"/>
-        <a:font script="Laoo" typeface="DokChampa"/>
-        <a:font script="Sinh" typeface="Iskoola Pota"/>
-        <a:font script="Mong" typeface="Mongolian Baiti"/>
-        <a:font script="Viet" typeface="Arial"/>
-        <a:font script="Uigh" typeface="Microsoft Uighur"/>
-        <a:font script="Geor" typeface="Sylfaen"/>
-        <a:font script="Armn" typeface="Arial"/>
-        <a:font script="Bugi" typeface="Leelawadee UI"/>
-        <a:font script="Bopo" typeface="Microsoft JhengHei"/>
-        <a:font script="Java" typeface="Javanese Text"/>
-        <a:font script="Lisu" typeface="Segoe UI"/>
-        <a:font script="Mymr" typeface="Myanmar Text"/>
-        <a:font script="Nkoo" typeface="Ebrima"/>
-        <a:font script="Olck" typeface="Nirmala UI"/>
-        <a:font script="Osma" typeface="Ebrima"/>
-        <a:font script="Phag" typeface="Phagspa"/>
-        <a:font script="Syrn" typeface="Estrangelo Edessa"/>
-        <a:font script="Syrj" typeface="Estrangelo Edessa"/>
-        <a:font script="Syre" typeface="Estrangelo Edessa"/>
-        <a:font script="Sora" typeface="Nirmala UI"/>
-        <a:font script="Tale" typeface="Microsoft Tai Le"/>
-        <a:font script="Talu" typeface="Microsoft New Tai Lue"/>
-        <a:font script="Tfng" typeface="Ebrima"/>
-      </a:minorFont>
-    </a:fontScheme>
-    <a:fmtScheme name="Office">
-      <a:fillStyleLst>
-        <a:solidFill>
-          <a:schemeClr val="phClr"/>
-        </a:solidFill>
-        <a:gradFill rotWithShape="1">
-          <a:gsLst>
-            <a:gs pos="0">
-              <a:schemeClr val="phClr">
-                <a:lumMod val="110000"/>
-                <a:satMod val="105000"/>
-                <a:tint val="67000"/>
-              </a:schemeClr>
-            </a:gs>
-            <a:gs pos="50000">
-              <a:schemeClr val="phClr">
-                <a:lumMod val="105000"/>
-                <a:satMod val="103000"/>
-                <a:tint val="73000"/>
-              </a:schemeClr>
-            </a:gs>
-            <a:gs pos="100000">
-              <a:schemeClr val="phClr">
-                <a:lumMod val="105000"/>
-                <a:satMod val="109000"/>
-                <a:tint val="81000"/>
-              </a:schemeClr>
-            </a:gs>
-          </a:gsLst>
-          <a:lin ang="5400000" scaled="0"/>
-        </a:gradFill>
-        <a:gradFill rotWithShape="1">
-          <a:gsLst>
-            <a:gs pos="0">
-              <a:schemeClr val="phClr">
-                <a:satMod val="103000"/>
-                <a:lumMod val="102000"/>
-                <a:tint val="94000"/>
-              </a:schemeClr>
-            </a:gs>
-            <a:gs pos="50000">
-              <a:schemeClr val="phClr">
-                <a:satMod val="110000"/>
-                <a:lumMod val="100000"/>
-                <a:shade val="100000"/>
-              </a:schemeClr>
-            </a:gs>
-            <a:gs pos="100000">
-              <a:schemeClr val="phClr">
-                <a:lumMod val="99000"/>
-                <a:satMod val="120000"/>
-                <a:shade val="78000"/>
-              </a:schemeClr>
-            </a:gs>
-          </a:gsLst>
-          <a:lin ang="5400000" scaled="0"/>
-        </a:gradFill>
-      </a:fillStyleLst>
-      <a:lnStyleLst>
-        <a:ln w="12700" cap="flat" cmpd="sng" algn="ctr">
-          <a:solidFill>
-            <a:schemeClr val="phClr"/>
-          </a:solidFill>
-          <a:prstDash val="solid"/>
-          <a:miter lim="800000"/>
-        </a:ln>
-        <a:ln w="19050" cap="flat" cmpd="sng" algn="ctr">
-          <a:solidFill>
-            <a:schemeClr val="phClr"/>
-          </a:solidFill>
-          <a:prstDash val="solid"/>
-          <a:miter lim="800000"/>
-        </a:ln>
-        <a:ln w="25400" cap="flat" cmpd="sng" algn="ctr">
-          <a:solidFill>
-            <a:schemeClr val="phClr"/>
-          </a:solidFill>
-          <a:prstDash val="solid"/>
-          <a:miter lim="800000"/>
-        </a:ln>
-      </a:lnStyleLst>
-      <a:effectStyleLst>
-        <a:effectStyle>
-          <a:effectLst/>
-        </a:effectStyle>
-        <a:effectStyle>
-          <a:effectLst/>
-        </a:effectStyle>
-        <a:effectStyle>
-          <a:effectLst>
-            <a:outerShdw blurRad="57150" dist="19050" dir="5400000" algn="ctr" rotWithShape="0">
-              <a:srgbClr val="000000">
-                <a:alpha val="63000"/>
-              </a:srgbClr>
-            </a:outerShdw>
-          </a:effectLst>
-        </a:effectStyle>
-      </a:effectStyleLst>
-      <a:bgFillStyleLst>
-        <a:solidFill>
-          <a:schemeClr val="phClr"/>
-        </a:solidFill>
-        <a:solidFill>
-          <a:schemeClr val="phClr">
-            <a:tint val="95000"/>
-            <a:satMod val="170000"/>
-          </a:schemeClr>
-        </a:solidFill>
-        <a:gradFill rotWithShape="1">
-          <a:gsLst>
-            <a:gs pos="0">
-              <a:schemeClr val="phClr">
-                <a:tint val="93000"/>
-                <a:satMod val="150000"/>
-                <a:shade val="98000"/>
-                <a:lumMod val="102000"/>
-              </a:schemeClr>
-            </a:gs>
-            <a:gs pos="50000">
-              <a:schemeClr val="phClr">
-                <a:tint val="98000"/>
-                <a:satMod val="130000"/>
-                <a:shade val="90000"/>
-                <a:lumMod val="103000"/>
-              </a:schemeClr>
-            </a:gs>
-            <a:gs pos="100000">
-              <a:schemeClr val="phClr">
-                <a:shade val="63000"/>
-                <a:satMod val="120000"/>
-              </a:schemeClr>
-            </a:gs>
-          </a:gsLst>
-          <a:lin ang="5400000" scaled="0"/>
-        </a:gradFill>
-      </a:bgFillStyleLst>
-    </a:fmtScheme>
-  </a:themeElements>
-  <a:objectDefaults>
-    <a:lnDef>
-      <a:spPr/>
-      <a:bodyPr/>
-      <a:lstStyle/>
-      <a:style>
-        <a:lnRef idx="2">
-          <a:schemeClr val="accent1"/>
-        </a:lnRef>
-        <a:fillRef idx="0">
-          <a:schemeClr val="accent1"/>
-        </a:fillRef>
-        <a:effectRef idx="1">
-          <a:schemeClr val="accent1"/>
-        </a:effectRef>
-        <a:fontRef idx="minor">
-          <a:schemeClr val="tx1"/>
-        </a:fontRef>
-      </a:style>
-    </a:lnDef>
-  </a:objectDefaults>
-  <a:extraClrSchemeLst/>
-  <a:extLst>
-    <a:ext uri="{05A4C25C-085E-4340-85A3-A5531E510DB2}">
-      <thm15:themeFamily xmlns:thm15="http://schemas.microsoft.com/office/thememl/2012/main" name="Office Theme" id="{2E142A2C-CD16-42D6-873A-C26D2A0506FA}" vid="{1BDDFF52-6CD6-40A5-AB3C-68EB2F1E4D0A}"/>
-    </a:ext>
-  </a:extLst>
-</a:theme>
 </file>